--- a/Мышка для людей с ОВЗ/Документы/Презентация о манипуляторе.pptx
+++ b/Мышка для людей с ОВЗ/Документы/Презентация о манипуляторе.pptx
@@ -149,20 +149,6 @@
 </p:cmAuthorLst>
 </file>
 
-<file path=ppt/comments/comment1.xml><?xml version="1.0" encoding="utf-8"?>
-<p:cmLst xmlns:a="http://schemas.openxmlformats.org/drawingml/2006/main" xmlns:r="http://schemas.openxmlformats.org/officeDocument/2006/relationships" xmlns:p="http://schemas.openxmlformats.org/presentationml/2006/main">
-  <p:cm authorId="1" dt="2026-02-09T10:34:21.973" idx="1">
-    <p:pos x="10" y="10"/>
-    <p:text/>
-    <p:extLst>
-      <p:ext uri="{C676402C-5697-4E1C-873F-D02D1690AC5C}">
-        <p15:threadingInfo xmlns:p15="http://schemas.microsoft.com/office/powerpoint/2012/main" timeZoneBias="-180"/>
-      </p:ext>
-    </p:extLst>
-  </p:cm>
-</p:cmLst>
-</file>
-
 <file path=ppt/slideLayouts/slideLayout1.xml><?xml version="1.0" encoding="utf-8"?>
 <p:sldLayout xmlns:a="http://schemas.openxmlformats.org/drawingml/2006/main" xmlns:r="http://schemas.openxmlformats.org/officeDocument/2006/relationships" xmlns:p="http://schemas.openxmlformats.org/presentationml/2006/main" showMasterSp="0" type="title" preserve="1">
   <p:cSld name="Титульный слайд">
@@ -389,7 +375,7 @@
           <a:p>
             <a:fld id="{BB72D5D3-D9D5-4A9C-867E-F13F5DA2FF7F}" type="datetimeFigureOut">
               <a:rPr lang="ru-RU" smtClean="0"/>
-              <a:t>10.02.2026</a:t>
+              <a:t>23.04.2026</a:t>
             </a:fld>
             <a:endParaRPr lang="ru-RU"/>
           </a:p>
@@ -597,7 +583,7 @@
           <a:p>
             <a:fld id="{BB72D5D3-D9D5-4A9C-867E-F13F5DA2FF7F}" type="datetimeFigureOut">
               <a:rPr lang="ru-RU" smtClean="0"/>
-              <a:t>10.02.2026</a:t>
+              <a:t>23.04.2026</a:t>
             </a:fld>
             <a:endParaRPr lang="ru-RU"/>
           </a:p>
@@ -853,7 +839,7 @@
           <a:p>
             <a:fld id="{BB72D5D3-D9D5-4A9C-867E-F13F5DA2FF7F}" type="datetimeFigureOut">
               <a:rPr lang="ru-RU" smtClean="0"/>
-              <a:t>10.02.2026</a:t>
+              <a:t>23.04.2026</a:t>
             </a:fld>
             <a:endParaRPr lang="ru-RU"/>
           </a:p>
@@ -1027,7 +1013,7 @@
           <a:p>
             <a:fld id="{BB72D5D3-D9D5-4A9C-867E-F13F5DA2FF7F}" type="datetimeFigureOut">
               <a:rPr lang="ru-RU" smtClean="0"/>
-              <a:t>10.02.2026</a:t>
+              <a:t>23.04.2026</a:t>
             </a:fld>
             <a:endParaRPr lang="ru-RU"/>
           </a:p>
@@ -1370,7 +1356,7 @@
           <a:p>
             <a:fld id="{BB72D5D3-D9D5-4A9C-867E-F13F5DA2FF7F}" type="datetimeFigureOut">
               <a:rPr lang="ru-RU" smtClean="0"/>
-              <a:t>10.02.2026</a:t>
+              <a:t>23.04.2026</a:t>
             </a:fld>
             <a:endParaRPr lang="ru-RU"/>
           </a:p>
@@ -1645,7 +1631,7 @@
           <a:p>
             <a:fld id="{BB72D5D3-D9D5-4A9C-867E-F13F5DA2FF7F}" type="datetimeFigureOut">
               <a:rPr lang="ru-RU" smtClean="0"/>
-              <a:t>10.02.2026</a:t>
+              <a:t>23.04.2026</a:t>
             </a:fld>
             <a:endParaRPr lang="ru-RU"/>
           </a:p>
@@ -2024,7 +2010,7 @@
           <a:p>
             <a:fld id="{BB72D5D3-D9D5-4A9C-867E-F13F5DA2FF7F}" type="datetimeFigureOut">
               <a:rPr lang="ru-RU" smtClean="0"/>
-              <a:t>10.02.2026</a:t>
+              <a:t>23.04.2026</a:t>
             </a:fld>
             <a:endParaRPr lang="ru-RU"/>
           </a:p>
@@ -2142,7 +2128,7 @@
           <a:p>
             <a:fld id="{BB72D5D3-D9D5-4A9C-867E-F13F5DA2FF7F}" type="datetimeFigureOut">
               <a:rPr lang="ru-RU" smtClean="0"/>
-              <a:t>10.02.2026</a:t>
+              <a:t>23.04.2026</a:t>
             </a:fld>
             <a:endParaRPr lang="ru-RU"/>
           </a:p>
@@ -2313,7 +2299,7 @@
           <a:p>
             <a:fld id="{BB72D5D3-D9D5-4A9C-867E-F13F5DA2FF7F}" type="datetimeFigureOut">
               <a:rPr lang="ru-RU" smtClean="0"/>
-              <a:t>10.02.2026</a:t>
+              <a:t>23.04.2026</a:t>
             </a:fld>
             <a:endParaRPr lang="ru-RU"/>
           </a:p>
@@ -2667,7 +2653,7 @@
           <a:p>
             <a:fld id="{BB72D5D3-D9D5-4A9C-867E-F13F5DA2FF7F}" type="datetimeFigureOut">
               <a:rPr lang="ru-RU" smtClean="0"/>
-              <a:t>10.02.2026</a:t>
+              <a:t>23.04.2026</a:t>
             </a:fld>
             <a:endParaRPr lang="ru-RU"/>
           </a:p>
@@ -3049,7 +3035,7 @@
           <a:p>
             <a:fld id="{BB72D5D3-D9D5-4A9C-867E-F13F5DA2FF7F}" type="datetimeFigureOut">
               <a:rPr lang="ru-RU" smtClean="0"/>
-              <a:t>10.02.2026</a:t>
+              <a:t>23.04.2026</a:t>
             </a:fld>
             <a:endParaRPr lang="ru-RU"/>
           </a:p>
@@ -3336,7 +3322,7 @@
           <a:p>
             <a:fld id="{BB72D5D3-D9D5-4A9C-867E-F13F5DA2FF7F}" type="datetimeFigureOut">
               <a:rPr lang="ru-RU" smtClean="0"/>
-              <a:t>10.02.2026</a:t>
+              <a:t>23.04.2026</a:t>
             </a:fld>
             <a:endParaRPr lang="ru-RU"/>
           </a:p>
@@ -4353,6 +4339,13 @@
   <p:clrMapOvr>
     <a:masterClrMapping/>
   </p:clrMapOvr>
+  <p:timing>
+    <p:tnLst>
+      <p:par>
+        <p:cTn id="1" dur="indefinite" restart="never" nodeType="tmRoot"/>
+      </p:par>
+    </p:tnLst>
+  </p:timing>
 </p:sld>
 </file>
 
@@ -4687,61 +4680,6 @@
       </p:pic>
       <p:sp>
         <p:nvSpPr>
-          <p:cNvPr id="13" name="TextBox 12">
-            <a:extLst>
-              <a:ext uri="{FF2B5EF4-FFF2-40B4-BE49-F238E27FC236}">
-                <a16:creationId xmlns:a16="http://schemas.microsoft.com/office/drawing/2014/main" id="{E688D54D-CE18-D886-E409-CC353FBDB53A}"/>
-              </a:ext>
-            </a:extLst>
-          </p:cNvPr>
-          <p:cNvSpPr txBox="1"/>
-          <p:nvPr/>
-        </p:nvSpPr>
-        <p:spPr>
-          <a:xfrm>
-            <a:off x="4617720" y="969686"/>
-            <a:ext cx="7325511" cy="4364465"/>
-          </a:xfrm>
-          <a:prstGeom prst="rect">
-            <a:avLst/>
-          </a:prstGeom>
-          <a:noFill/>
-        </p:spPr>
-        <p:txBody>
-          <a:bodyPr wrap="square" rtlCol="0">
-            <a:spAutoFit/>
-          </a:bodyPr>
-          <a:lstStyle/>
-          <a:p>
-            <a:pPr algn="just">
-              <a:lnSpc>
-                <a:spcPct val="150000"/>
-              </a:lnSpc>
-            </a:pPr>
-            <a:r>
-              <a:rPr lang="ru-RU" sz="1700" dirty="0">
-                <a:latin typeface="Bookman Old Style" panose="02050604050505020204" pitchFamily="18" charset="0"/>
-              </a:rPr>
-              <a:t>Множество людей в современном мире страдают от проблем с мелкой моторикой, и все они часто имеют трудности при коммуникации с цифровой средой, которая в наше время отвечает за поток информации, учебу, работу и многое другое. Для таких людей обыкновенные средства ввода часто становятся непреодолимым барьером.</a:t>
-            </a:r>
-          </a:p>
-          <a:p>
-            <a:pPr algn="just">
-              <a:lnSpc>
-                <a:spcPct val="150000"/>
-              </a:lnSpc>
-            </a:pPr>
-            <a:r>
-              <a:rPr lang="ru-RU" sz="1700" dirty="0">
-                <a:latin typeface="Bookman Old Style" panose="02050604050505020204" pitchFamily="18" charset="0"/>
-              </a:rPr>
-              <a:t>Высокая стоимость от 5 тыс. рублей, сложность настройки, необходимость в специальной подготовке пользователя, а также часто минимальная эффективность при треморе делает аналоги на рынке неподходящими для пожилых людей или людей с ограниченными возможностями.</a:t>
-            </a:r>
-          </a:p>
-        </p:txBody>
-      </p:sp>
-      <p:sp>
-        <p:nvSpPr>
           <p:cNvPr id="22" name="Прямоугольник 21">
             <a:extLst>
               <a:ext uri="{FF2B5EF4-FFF2-40B4-BE49-F238E27FC236}">
@@ -4791,6 +4729,146 @@
           <a:p>
             <a:pPr algn="ctr"/>
             <a:endParaRPr lang="ru-RU"/>
+          </a:p>
+        </p:txBody>
+      </p:sp>
+      <p:sp>
+        <p:nvSpPr>
+          <p:cNvPr id="16" name="TextBox 15">
+            <a:extLst>
+              <a:ext uri="{FF2B5EF4-FFF2-40B4-BE49-F238E27FC236}">
+                <a16:creationId xmlns:a16="http://schemas.microsoft.com/office/drawing/2014/main" id="{E688D54D-CE18-D886-E409-CC353FBDB53A}"/>
+              </a:ext>
+            </a:extLst>
+          </p:cNvPr>
+          <p:cNvSpPr txBox="1"/>
+          <p:nvPr/>
+        </p:nvSpPr>
+        <p:spPr>
+          <a:xfrm>
+            <a:off x="4378629" y="1099850"/>
+            <a:ext cx="7005938" cy="1477328"/>
+          </a:xfrm>
+          <a:prstGeom prst="rect">
+            <a:avLst/>
+          </a:prstGeom>
+          <a:noFill/>
+        </p:spPr>
+        <p:txBody>
+          <a:bodyPr wrap="square" rtlCol="0">
+            <a:spAutoFit/>
+          </a:bodyPr>
+          <a:lstStyle/>
+          <a:p>
+            <a:pPr lvl="1" algn="just">
+              <a:lnSpc>
+                <a:spcPct val="150000"/>
+              </a:lnSpc>
+            </a:pPr>
+            <a:r>
+              <a:rPr lang="ru-RU" sz="2000" dirty="0" smtClean="0">
+                <a:latin typeface="Bookman Old Style" panose="02050604050505020204" pitchFamily="18" charset="0"/>
+              </a:rPr>
+              <a:t>Цифровая среда недоступна для людей с ограниченной моторикой, ведь существующие решения имеют:</a:t>
+            </a:r>
+            <a:endParaRPr lang="ru-RU" sz="2000" dirty="0">
+              <a:latin typeface="Bookman Old Style" panose="02050604050505020204" pitchFamily="18" charset="0"/>
+            </a:endParaRPr>
+          </a:p>
+        </p:txBody>
+      </p:sp>
+      <p:sp>
+        <p:nvSpPr>
+          <p:cNvPr id="17" name="TextBox 16"/>
+          <p:cNvSpPr txBox="1"/>
+          <p:nvPr/>
+        </p:nvSpPr>
+        <p:spPr>
+          <a:xfrm>
+            <a:off x="5231789" y="2577178"/>
+            <a:ext cx="5454683" cy="1938992"/>
+          </a:xfrm>
+          <a:prstGeom prst="rect">
+            <a:avLst/>
+          </a:prstGeom>
+          <a:noFill/>
+        </p:spPr>
+        <p:txBody>
+          <a:bodyPr wrap="square" rtlCol="0">
+            <a:spAutoFit/>
+          </a:bodyPr>
+          <a:lstStyle/>
+          <a:p>
+            <a:pPr marL="285750" indent="-285750">
+              <a:lnSpc>
+                <a:spcPct val="150000"/>
+              </a:lnSpc>
+              <a:buFont typeface="Arial" panose="020B0604020202020204" pitchFamily="34" charset="0"/>
+              <a:buChar char="•"/>
+            </a:pPr>
+            <a:r>
+              <a:rPr lang="ru-RU" sz="2000" dirty="0" smtClean="0">
+                <a:latin typeface="Bookman Old Style" panose="02050604050505020204" pitchFamily="18" charset="0"/>
+              </a:rPr>
+              <a:t>Высоку</a:t>
+            </a:r>
+            <a:r>
+              <a:rPr lang="ru-RU" sz="2000" dirty="0">
+                <a:latin typeface="Bookman Old Style" panose="02050604050505020204" pitchFamily="18" charset="0"/>
+              </a:rPr>
+              <a:t>ю</a:t>
+            </a:r>
+            <a:r>
+              <a:rPr lang="ru-RU" sz="2000" dirty="0" smtClean="0">
+                <a:latin typeface="Bookman Old Style" panose="02050604050505020204" pitchFamily="18" charset="0"/>
+              </a:rPr>
+              <a:t> стоимость(от 5 тыс. рублей)</a:t>
+            </a:r>
+          </a:p>
+          <a:p>
+            <a:pPr marL="285750" indent="-285750">
+              <a:lnSpc>
+                <a:spcPct val="150000"/>
+              </a:lnSpc>
+              <a:buFont typeface="Arial" panose="020B0604020202020204" pitchFamily="34" charset="0"/>
+              <a:buChar char="•"/>
+            </a:pPr>
+            <a:r>
+              <a:rPr lang="ru-RU" sz="2000" dirty="0" smtClean="0">
+                <a:latin typeface="Bookman Old Style" panose="02050604050505020204" pitchFamily="18" charset="0"/>
+              </a:rPr>
+              <a:t>Сложну</a:t>
+            </a:r>
+            <a:r>
+              <a:rPr lang="ru-RU" sz="2000" dirty="0">
+                <a:latin typeface="Bookman Old Style" panose="02050604050505020204" pitchFamily="18" charset="0"/>
+              </a:rPr>
+              <a:t>ю</a:t>
+            </a:r>
+            <a:r>
+              <a:rPr lang="ru-RU" sz="2000" dirty="0" smtClean="0">
+                <a:latin typeface="Bookman Old Style" panose="02050604050505020204" pitchFamily="18" charset="0"/>
+              </a:rPr>
+              <a:t> настройку</a:t>
+            </a:r>
+          </a:p>
+          <a:p>
+            <a:pPr marL="285750" indent="-285750">
+              <a:lnSpc>
+                <a:spcPct val="150000"/>
+              </a:lnSpc>
+              <a:buFont typeface="Arial" panose="020B0604020202020204" pitchFamily="34" charset="0"/>
+              <a:buChar char="•"/>
+            </a:pPr>
+            <a:r>
+              <a:rPr lang="ru-RU" sz="2000" dirty="0" smtClean="0">
+                <a:latin typeface="Bookman Old Style" panose="02050604050505020204" pitchFamily="18" charset="0"/>
+              </a:rPr>
+              <a:t>Минимальную эффективность при треморе</a:t>
+            </a:r>
+            <a:endParaRPr lang="ru-RU" sz="2000" dirty="0">
+              <a:latin typeface="Bookman Old Style" panose="02050604050505020204" pitchFamily="18" charset="0"/>
+            </a:endParaRPr>
           </a:p>
         </p:txBody>
       </p:sp>
@@ -4903,7 +4981,7 @@
         </p:nvSpPr>
         <p:spPr>
           <a:xfrm rot="16200000">
-            <a:off x="4240595" y="-893004"/>
+            <a:off x="4188779" y="-518593"/>
             <a:ext cx="3710809" cy="12362691"/>
           </a:xfrm>
           <a:prstGeom prst="rect">
@@ -5149,7 +5227,7 @@
         </p:blipFill>
         <p:spPr>
           <a:xfrm>
-            <a:off x="723902" y="746261"/>
+            <a:off x="751611" y="1022551"/>
             <a:ext cx="3034281" cy="2452122"/>
           </a:xfrm>
           <a:prstGeom prst="rect">
@@ -5195,7 +5273,7 @@
         </p:blipFill>
         <p:spPr bwMode="auto">
           <a:xfrm>
-            <a:off x="8572920" y="862879"/>
+            <a:off x="8572920" y="1110381"/>
             <a:ext cx="2573616" cy="2071890"/>
           </a:xfrm>
           <a:prstGeom prst="rect">
@@ -5241,7 +5319,7 @@
         </p:blipFill>
         <p:spPr>
           <a:xfrm>
-            <a:off x="4527044" y="320485"/>
+            <a:off x="4527042" y="556225"/>
             <a:ext cx="3034281" cy="3034281"/>
           </a:xfrm>
           <a:prstGeom prst="rect">
@@ -5263,8 +5341,8 @@
         </p:nvSpPr>
         <p:spPr>
           <a:xfrm>
-            <a:off x="408450" y="3616487"/>
-            <a:ext cx="3458778" cy="1815882"/>
+            <a:off x="516819" y="4758025"/>
+            <a:ext cx="3458778" cy="1200329"/>
           </a:xfrm>
           <a:prstGeom prst="rect">
             <a:avLst/>
@@ -5278,7 +5356,7 @@
           <a:lstStyle/>
           <a:p>
             <a:r>
-              <a:rPr lang="ru-RU" sz="1600" dirty="0">
+              <a:rPr lang="ru-RU" sz="2400" dirty="0">
                 <a:solidFill>
                   <a:schemeClr val="bg1"/>
                 </a:solidFill>
@@ -5287,7 +5365,7 @@
               <a:t>Головной указатель «</a:t>
             </a:r>
             <a:r>
-              <a:rPr lang="en-US" sz="1600" dirty="0">
+              <a:rPr lang="en-US" sz="2400" dirty="0">
                 <a:solidFill>
                   <a:schemeClr val="bg1"/>
                 </a:solidFill>
@@ -5296,7 +5374,7 @@
               <a:t>Eye Gaze</a:t>
             </a:r>
             <a:r>
-              <a:rPr lang="ru-RU" sz="1600" dirty="0">
+              <a:rPr lang="ru-RU" sz="2400" dirty="0">
                 <a:solidFill>
                   <a:schemeClr val="bg1"/>
                 </a:solidFill>
@@ -5305,22 +5383,19 @@
               <a:t>»</a:t>
             </a:r>
             <a:br>
-              <a:rPr lang="ru-RU" sz="1600" dirty="0">
+              <a:rPr lang="ru-RU" sz="2400" dirty="0">
                 <a:solidFill>
                   <a:schemeClr val="bg1"/>
                 </a:solidFill>
                 <a:latin typeface="Bookman Old Style" panose="02050604050505020204" pitchFamily="18" charset="0"/>
               </a:rPr>
             </a:br>
-            <a:r>
-              <a:rPr lang="ru-RU" sz="1600" dirty="0">
-                <a:solidFill>
-                  <a:schemeClr val="bg1"/>
-                </a:solidFill>
-                <a:latin typeface="Bookman Old Style" panose="02050604050505020204" pitchFamily="18" charset="0"/>
-              </a:rPr>
-              <a:t>Следит за движением глаз, не задействует руки, однако имеет сложную калибровку, высокую стоимость и сильные неточности при недостатке света.</a:t>
-            </a:r>
+            <a:endParaRPr lang="ru-RU" sz="2400" dirty="0">
+              <a:solidFill>
+                <a:schemeClr val="bg1"/>
+              </a:solidFill>
+              <a:latin typeface="Bookman Old Style" panose="02050604050505020204" pitchFamily="18" charset="0"/>
+            </a:endParaRPr>
           </a:p>
         </p:txBody>
       </p:sp>
@@ -5338,8 +5413,8 @@
         </p:nvSpPr>
         <p:spPr>
           <a:xfrm>
-            <a:off x="4361025" y="3577402"/>
-            <a:ext cx="3699848" cy="1815882"/>
+            <a:off x="4527042" y="4547460"/>
+            <a:ext cx="3699848" cy="1200329"/>
           </a:xfrm>
           <a:prstGeom prst="rect">
             <a:avLst/>
@@ -5353,7 +5428,7 @@
           <a:lstStyle/>
           <a:p>
             <a:r>
-              <a:rPr lang="ru-RU" sz="1600" dirty="0">
+              <a:rPr lang="ru-RU" sz="2400" dirty="0">
                 <a:solidFill>
                   <a:schemeClr val="bg1"/>
                 </a:solidFill>
@@ -5362,7 +5437,7 @@
               <a:t>Голосовой указатель</a:t>
             </a:r>
             <a:br>
-              <a:rPr lang="ru-RU" sz="1600" dirty="0">
+              <a:rPr lang="ru-RU" sz="2400" dirty="0">
                 <a:solidFill>
                   <a:schemeClr val="bg1"/>
                 </a:solidFill>
@@ -5370,7 +5445,7 @@
               </a:rPr>
             </a:br>
             <a:r>
-              <a:rPr lang="ru-RU" sz="1600" dirty="0">
+              <a:rPr lang="ru-RU" sz="2400" dirty="0">
                 <a:solidFill>
                   <a:schemeClr val="bg1"/>
                 </a:solidFill>
@@ -5379,7 +5454,7 @@
               <a:t>«</a:t>
             </a:r>
             <a:r>
-              <a:rPr lang="en-US" sz="1600" dirty="0">
+              <a:rPr lang="en-US" sz="2400" dirty="0">
                 <a:solidFill>
                   <a:schemeClr val="bg1"/>
                 </a:solidFill>
@@ -5388,7 +5463,7 @@
               <a:t>Dragon Naturally Speaking</a:t>
             </a:r>
             <a:r>
-              <a:rPr lang="ru-RU" sz="1600" dirty="0">
+              <a:rPr lang="ru-RU" sz="2400" dirty="0" smtClean="0">
                 <a:solidFill>
                   <a:schemeClr val="bg1"/>
                 </a:solidFill>
@@ -5396,24 +5471,43 @@
               </a:rPr>
               <a:t>»</a:t>
             </a:r>
-            <a:endParaRPr lang="en-US" sz="1600" dirty="0">
-              <a:solidFill>
-                <a:schemeClr val="bg1"/>
-              </a:solidFill>
-              <a:latin typeface="Bookman Old Style" panose="02050604050505020204" pitchFamily="18" charset="0"/>
-            </a:endParaRPr>
-          </a:p>
-          <a:p>
-            <a:r>
-              <a:rPr lang="ru-RU" sz="1600" dirty="0">
+            <a:r>
+              <a:rPr lang="ru-RU" sz="2400" dirty="0">
                 <a:solidFill>
                   <a:schemeClr val="bg1"/>
                 </a:solidFill>
                 <a:latin typeface="Bookman Old Style" panose="02050604050505020204" pitchFamily="18" charset="0"/>
               </a:rPr>
-              <a:t>Так же не задействует рук, но  нестабилен в шумной среде, имеет высокую стоимость и не подходит людям испытывающим проблемы с речью.</a:t>
-            </a:r>
-            <a:endParaRPr lang="en-US" sz="1600" dirty="0">
+              <a:t> </a:t>
+            </a:r>
+            <a:r>
+              <a:rPr lang="en-US" sz="2400" dirty="0" smtClean="0">
+                <a:solidFill>
+                  <a:schemeClr val="bg1"/>
+                </a:solidFill>
+                <a:latin typeface="Bookman Old Style" panose="02050604050505020204" pitchFamily="18" charset="0"/>
+              </a:rPr>
+              <a:t>(</a:t>
+            </a:r>
+            <a:r>
+              <a:rPr lang="ru-RU" sz="2400" dirty="0" smtClean="0">
+                <a:solidFill>
+                  <a:schemeClr val="bg1"/>
+                </a:solidFill>
+                <a:latin typeface="Bookman Old Style" panose="02050604050505020204" pitchFamily="18" charset="0"/>
+              </a:rPr>
+              <a:t>ПО</a:t>
+            </a:r>
+            <a:r>
+              <a:rPr lang="en-US" sz="2400" dirty="0" smtClean="0">
+                <a:solidFill>
+                  <a:schemeClr val="bg1"/>
+                </a:solidFill>
+                <a:latin typeface="Bookman Old Style" panose="02050604050505020204" pitchFamily="18" charset="0"/>
+              </a:rPr>
+              <a:t>)</a:t>
+            </a:r>
+            <a:endParaRPr lang="en-US" sz="2400" dirty="0">
               <a:solidFill>
                 <a:schemeClr val="bg1"/>
               </a:solidFill>
@@ -5436,8 +5530,8 @@
         </p:nvSpPr>
         <p:spPr>
           <a:xfrm>
-            <a:off x="8755380" y="3605844"/>
-            <a:ext cx="2948940" cy="1569660"/>
+            <a:off x="8803008" y="4732125"/>
+            <a:ext cx="2948940" cy="830997"/>
           </a:xfrm>
           <a:prstGeom prst="rect">
             <a:avLst/>
@@ -5451,7 +5545,7 @@
           <a:lstStyle/>
           <a:p>
             <a:r>
-              <a:rPr lang="en-US" sz="1600" dirty="0">
+              <a:rPr lang="en-US" sz="2400" dirty="0" smtClean="0">
                 <a:solidFill>
                   <a:schemeClr val="bg1"/>
                 </a:solidFill>
@@ -5460,7 +5554,7 @@
               <a:t>Trackball </a:t>
             </a:r>
             <a:r>
-              <a:rPr lang="ru-RU" sz="1600" dirty="0">
+              <a:rPr lang="ru-RU" sz="2400" dirty="0">
                 <a:solidFill>
                   <a:schemeClr val="bg1"/>
                 </a:solidFill>
@@ -5469,7 +5563,7 @@
               <a:t>«</a:t>
             </a:r>
             <a:r>
-              <a:rPr lang="en-US" sz="1600" dirty="0">
+              <a:rPr lang="en-US" sz="2400" dirty="0">
                 <a:solidFill>
                   <a:schemeClr val="bg1"/>
                 </a:solidFill>
@@ -5478,7 +5572,7 @@
               <a:t>Logitech Marble</a:t>
             </a:r>
             <a:r>
-              <a:rPr lang="ru-RU" sz="1600" dirty="0">
+              <a:rPr lang="ru-RU" sz="2400" dirty="0" smtClean="0">
                 <a:solidFill>
                   <a:schemeClr val="bg1"/>
                 </a:solidFill>
@@ -5486,57 +5580,12 @@
               </a:rPr>
               <a:t>»</a:t>
             </a:r>
-          </a:p>
-          <a:p>
-            <a:r>
-              <a:rPr lang="ru-RU" sz="1600" dirty="0">
-                <a:solidFill>
-                  <a:schemeClr val="bg1"/>
-                </a:solidFill>
-                <a:latin typeface="Bookman Old Style" panose="02050604050505020204" pitchFamily="18" charset="0"/>
-              </a:rPr>
-              <a:t>Не задействует всю руку, однако требует точной мелкой моторики, что очень редко наблюдается у людей с тремором рук.</a:t>
-            </a:r>
-          </a:p>
-        </p:txBody>
-      </p:sp>
-      <p:sp>
-        <p:nvSpPr>
-          <p:cNvPr id="26" name="TextBox 25">
-            <a:extLst>
-              <a:ext uri="{FF2B5EF4-FFF2-40B4-BE49-F238E27FC236}">
-                <a16:creationId xmlns:a16="http://schemas.microsoft.com/office/drawing/2014/main" id="{51C1815B-F396-BA02-D269-6D3991EDF780}"/>
-              </a:ext>
-            </a:extLst>
-          </p:cNvPr>
-          <p:cNvSpPr txBox="1"/>
-          <p:nvPr/>
-        </p:nvSpPr>
-        <p:spPr>
-          <a:xfrm>
-            <a:off x="193548" y="5615920"/>
-            <a:ext cx="11894820" cy="646331"/>
-          </a:xfrm>
-          <a:prstGeom prst="rect">
-            <a:avLst/>
-          </a:prstGeom>
-          <a:noFill/>
-        </p:spPr>
-        <p:txBody>
-          <a:bodyPr wrap="square" rtlCol="0">
-            <a:spAutoFit/>
-          </a:bodyPr>
-          <a:lstStyle/>
-          <a:p>
-            <a:r>
-              <a:rPr lang="ru-RU" dirty="0">
-                <a:solidFill>
-                  <a:schemeClr val="bg1"/>
-                </a:solidFill>
-                <a:latin typeface="Bookman Old Style" panose="02050604050505020204" pitchFamily="18" charset="0"/>
-              </a:rPr>
-              <a:t>Анализ показал, что ни один из существующих аналогов не решает ключевую проблему: физическая стабилизация движения руки при сохранении интуитивного, привычного интерфейса.</a:t>
-            </a:r>
+            <a:endParaRPr lang="ru-RU" sz="2400" dirty="0">
+              <a:solidFill>
+                <a:schemeClr val="bg1"/>
+              </a:solidFill>
+              <a:latin typeface="Bookman Old Style" panose="02050604050505020204" pitchFamily="18" charset="0"/>
+            </a:endParaRPr>
           </a:p>
         </p:txBody>
       </p:sp>
@@ -5833,7 +5882,7 @@
         <p:spPr>
           <a:xfrm>
             <a:off x="478535" y="863408"/>
-            <a:ext cx="6041137" cy="646331"/>
+            <a:ext cx="6041137" cy="369332"/>
           </a:xfrm>
           <a:prstGeom prst="rect">
             <a:avLst/>
@@ -5847,30 +5896,9 @@
           <a:lstStyle/>
           <a:p>
             <a:pPr algn="just"/>
-            <a:r>
-              <a:rPr lang="ru-RU" b="1" dirty="0">
-                <a:latin typeface="Bookman Old Style" panose="02050604050505020204" pitchFamily="18" charset="0"/>
-              </a:rPr>
-              <a:t>Целью работы </a:t>
-            </a:r>
-            <a:r>
-              <a:rPr lang="ru-RU" dirty="0">
-                <a:latin typeface="Bookman Old Style" panose="02050604050505020204" pitchFamily="18" charset="0"/>
-              </a:rPr>
-              <a:t>является</a:t>
-            </a:r>
-            <a:r>
-              <a:rPr lang="ru-RU" b="1" dirty="0">
-                <a:latin typeface="Bookman Old Style" panose="02050604050505020204" pitchFamily="18" charset="0"/>
-              </a:rPr>
-              <a:t> </a:t>
-            </a:r>
-            <a:r>
-              <a:rPr lang="ru-RU" dirty="0">
-                <a:latin typeface="Bookman Old Style" panose="02050604050505020204" pitchFamily="18" charset="0"/>
-              </a:rPr>
-              <a:t>создание механического манипулятора, обеспечивающего:</a:t>
-            </a:r>
+            <a:endParaRPr lang="ru-RU" dirty="0">
+              <a:latin typeface="Bookman Old Style" panose="02050604050505020204" pitchFamily="18" charset="0"/>
+            </a:endParaRPr>
           </a:p>
         </p:txBody>
       </p:sp>
@@ -5889,7 +5917,7 @@
         <p:spPr>
           <a:xfrm>
             <a:off x="832513" y="1402733"/>
-            <a:ext cx="5833872" cy="1477328"/>
+            <a:ext cx="5833872" cy="369332"/>
           </a:xfrm>
           <a:prstGeom prst="rect">
             <a:avLst/>
@@ -5906,194 +5934,9 @@
               <a:buFont typeface="Arial" panose="020B0604020202020204" pitchFamily="34" charset="0"/>
               <a:buChar char="•"/>
             </a:pPr>
-            <a:r>
-              <a:rPr lang="ru-RU" dirty="0">
-                <a:latin typeface="Bookman Old Style" panose="02050604050505020204" pitchFamily="18" charset="0"/>
-              </a:rPr>
-              <a:t>Стабильное и точное управление курсором</a:t>
-            </a:r>
-          </a:p>
-          <a:p>
-            <a:pPr marL="342900" indent="-342900">
-              <a:buFont typeface="Arial" panose="020B0604020202020204" pitchFamily="34" charset="0"/>
-              <a:buChar char="•"/>
-            </a:pPr>
-            <a:r>
-              <a:rPr lang="ru-RU" dirty="0">
-                <a:latin typeface="Bookman Old Style" panose="02050604050505020204" pitchFamily="18" charset="0"/>
-              </a:rPr>
-              <a:t>Пассивную физическую стабилизацию руки</a:t>
-            </a:r>
-          </a:p>
-          <a:p>
-            <a:pPr marL="342900" indent="-342900">
-              <a:buFont typeface="Arial" panose="020B0604020202020204" pitchFamily="34" charset="0"/>
-              <a:buChar char="•"/>
-            </a:pPr>
-            <a:r>
-              <a:rPr lang="ru-RU" dirty="0">
-                <a:latin typeface="Bookman Old Style" panose="02050604050505020204" pitchFamily="18" charset="0"/>
-              </a:rPr>
-              <a:t>Отсутствие сложной калибровки</a:t>
-            </a:r>
-          </a:p>
-          <a:p>
-            <a:pPr marL="342900" indent="-342900">
-              <a:buFont typeface="Arial" panose="020B0604020202020204" pitchFamily="34" charset="0"/>
-              <a:buChar char="•"/>
-            </a:pPr>
-            <a:r>
-              <a:rPr lang="ru-RU" dirty="0">
-                <a:latin typeface="Bookman Old Style" panose="02050604050505020204" pitchFamily="18" charset="0"/>
-              </a:rPr>
-              <a:t>Работа в любой среде, с плохим освещением или в шумных местах по типу офиса</a:t>
-            </a:r>
-          </a:p>
-        </p:txBody>
-      </p:sp>
-      <p:sp>
-        <p:nvSpPr>
-          <p:cNvPr id="16" name="TextBox 15">
-            <a:extLst>
-              <a:ext uri="{FF2B5EF4-FFF2-40B4-BE49-F238E27FC236}">
-                <a16:creationId xmlns:a16="http://schemas.microsoft.com/office/drawing/2014/main" id="{AE15037D-6E4B-250A-65BF-15C055A81B35}"/>
-              </a:ext>
-            </a:extLst>
-          </p:cNvPr>
-          <p:cNvSpPr txBox="1"/>
-          <p:nvPr/>
-        </p:nvSpPr>
-        <p:spPr>
-          <a:xfrm>
-            <a:off x="4370832" y="3346533"/>
-            <a:ext cx="5477256" cy="369332"/>
-          </a:xfrm>
-          <a:prstGeom prst="rect">
-            <a:avLst/>
-          </a:prstGeom>
-          <a:noFill/>
-        </p:spPr>
-        <p:txBody>
-          <a:bodyPr wrap="square" rtlCol="0">
-            <a:spAutoFit/>
-          </a:bodyPr>
-          <a:lstStyle/>
-          <a:p>
-            <a:r>
-              <a:rPr lang="ru-RU" dirty="0">
-                <a:latin typeface="Bookman Old Style" panose="02050604050505020204" pitchFamily="18" charset="0"/>
-              </a:rPr>
-              <a:t>Задачи проекта:</a:t>
-            </a:r>
-          </a:p>
-        </p:txBody>
-      </p:sp>
-      <p:sp>
-        <p:nvSpPr>
-          <p:cNvPr id="17" name="TextBox 16">
-            <a:extLst>
-              <a:ext uri="{FF2B5EF4-FFF2-40B4-BE49-F238E27FC236}">
-                <a16:creationId xmlns:a16="http://schemas.microsoft.com/office/drawing/2014/main" id="{77D84668-9A87-FB8E-C844-42909B460AE2}"/>
-              </a:ext>
-            </a:extLst>
-          </p:cNvPr>
-          <p:cNvSpPr txBox="1"/>
-          <p:nvPr/>
-        </p:nvSpPr>
-        <p:spPr>
-          <a:xfrm>
-            <a:off x="4617720" y="3531199"/>
-            <a:ext cx="6812280" cy="2308324"/>
-          </a:xfrm>
-          <a:prstGeom prst="rect">
-            <a:avLst/>
-          </a:prstGeom>
-          <a:noFill/>
-        </p:spPr>
-        <p:txBody>
-          <a:bodyPr wrap="square" rtlCol="0">
-            <a:spAutoFit/>
-          </a:bodyPr>
-          <a:lstStyle/>
-          <a:p>
             <a:endParaRPr lang="ru-RU" dirty="0">
               <a:latin typeface="Bookman Old Style" panose="02050604050505020204" pitchFamily="18" charset="0"/>
             </a:endParaRPr>
-          </a:p>
-          <a:p>
-            <a:pPr marL="342900" indent="-342900">
-              <a:buFont typeface="+mj-lt"/>
-              <a:buAutoNum type="arabicPeriod"/>
-            </a:pPr>
-            <a:r>
-              <a:rPr lang="ru-RU" dirty="0">
-                <a:latin typeface="Bookman Old Style" panose="02050604050505020204" pitchFamily="18" charset="0"/>
-              </a:rPr>
-              <a:t>Подобрать материалы и электрические компоненты</a:t>
-            </a:r>
-          </a:p>
-          <a:p>
-            <a:pPr marL="342900" indent="-342900">
-              <a:buFont typeface="+mj-lt"/>
-              <a:buAutoNum type="arabicPeriod"/>
-            </a:pPr>
-            <a:endParaRPr lang="ru-RU" dirty="0">
-              <a:latin typeface="Bookman Old Style" panose="02050604050505020204" pitchFamily="18" charset="0"/>
-            </a:endParaRPr>
-          </a:p>
-          <a:p>
-            <a:pPr marL="342900" indent="-342900">
-              <a:buFont typeface="+mj-lt"/>
-              <a:buAutoNum type="arabicPeriod"/>
-            </a:pPr>
-            <a:r>
-              <a:rPr lang="ru-RU" dirty="0">
-                <a:latin typeface="Bookman Old Style" panose="02050604050505020204" pitchFamily="18" charset="0"/>
-              </a:rPr>
-              <a:t>Разработать 3D-модель корпуса с учетом эргономики</a:t>
-            </a:r>
-          </a:p>
-          <a:p>
-            <a:pPr marL="342900" indent="-342900">
-              <a:buFont typeface="+mj-lt"/>
-              <a:buAutoNum type="arabicPeriod"/>
-            </a:pPr>
-            <a:endParaRPr lang="ru-RU" dirty="0">
-              <a:latin typeface="Bookman Old Style" panose="02050604050505020204" pitchFamily="18" charset="0"/>
-            </a:endParaRPr>
-          </a:p>
-          <a:p>
-            <a:pPr marL="342900" indent="-342900">
-              <a:buFont typeface="+mj-lt"/>
-              <a:buAutoNum type="arabicPeriod"/>
-            </a:pPr>
-            <a:r>
-              <a:rPr lang="ru-RU" dirty="0">
-                <a:latin typeface="Bookman Old Style" panose="02050604050505020204" pitchFamily="18" charset="0"/>
-              </a:rPr>
-              <a:t>Распечатать и запрограммировать устройство</a:t>
-            </a:r>
-          </a:p>
-          <a:p>
-            <a:pPr marL="342900" indent="-342900">
-              <a:buFont typeface="+mj-lt"/>
-              <a:buAutoNum type="arabicPeriod"/>
-            </a:pPr>
-            <a:endParaRPr lang="ru-RU" dirty="0">
-              <a:latin typeface="Bookman Old Style" panose="02050604050505020204" pitchFamily="18" charset="0"/>
-            </a:endParaRPr>
-          </a:p>
-          <a:p>
-            <a:pPr marL="342900" indent="-342900">
-              <a:buFont typeface="+mj-lt"/>
-              <a:buAutoNum type="arabicPeriod"/>
-            </a:pPr>
-            <a:r>
-              <a:rPr lang="ru-RU" dirty="0">
-                <a:latin typeface="Bookman Old Style" panose="02050604050505020204" pitchFamily="18" charset="0"/>
-              </a:rPr>
-              <a:t>Протестировать функциональность</a:t>
-            </a:r>
           </a:p>
         </p:txBody>
       </p:sp>
@@ -6148,6 +5991,309 @@
           <a:p>
             <a:pPr algn="ctr"/>
             <a:endParaRPr lang="ru-RU"/>
+          </a:p>
+        </p:txBody>
+      </p:sp>
+      <p:sp>
+        <p:nvSpPr>
+          <p:cNvPr id="18" name="TextBox 17">
+            <a:extLst>
+              <a:ext uri="{FF2B5EF4-FFF2-40B4-BE49-F238E27FC236}">
+                <a16:creationId xmlns:a16="http://schemas.microsoft.com/office/drawing/2014/main" id="{753C43B6-2D3A-404E-09D9-CA6B25DFB271}"/>
+              </a:ext>
+            </a:extLst>
+          </p:cNvPr>
+          <p:cNvSpPr txBox="1"/>
+          <p:nvPr/>
+        </p:nvSpPr>
+        <p:spPr>
+          <a:xfrm>
+            <a:off x="193562" y="648172"/>
+            <a:ext cx="9193557" cy="1015663"/>
+          </a:xfrm>
+          <a:prstGeom prst="rect">
+            <a:avLst/>
+          </a:prstGeom>
+          <a:noFill/>
+        </p:spPr>
+        <p:txBody>
+          <a:bodyPr wrap="square" rtlCol="0">
+            <a:spAutoFit/>
+          </a:bodyPr>
+          <a:lstStyle/>
+          <a:p>
+            <a:pPr algn="just">
+              <a:lnSpc>
+                <a:spcPct val="150000"/>
+              </a:lnSpc>
+            </a:pPr>
+            <a:r>
+              <a:rPr lang="ru-RU" sz="2000" b="1" dirty="0">
+                <a:latin typeface="Bahnschrift SemiLight" panose="020B0502040204020203" pitchFamily="34" charset="0"/>
+              </a:rPr>
+              <a:t>Целью </a:t>
+            </a:r>
+            <a:r>
+              <a:rPr lang="ru-RU" sz="2000" dirty="0">
+                <a:latin typeface="Bahnschrift SemiLight" panose="020B0502040204020203" pitchFamily="34" charset="0"/>
+              </a:rPr>
+              <a:t>работы</a:t>
+            </a:r>
+            <a:r>
+              <a:rPr lang="ru-RU" sz="2000" b="1" dirty="0">
+                <a:latin typeface="Bahnschrift SemiLight" panose="020B0502040204020203" pitchFamily="34" charset="0"/>
+              </a:rPr>
+              <a:t> </a:t>
+            </a:r>
+            <a:r>
+              <a:rPr lang="ru-RU" sz="2000" dirty="0">
+                <a:latin typeface="Bahnschrift SemiLight" panose="020B0502040204020203" pitchFamily="34" charset="0"/>
+              </a:rPr>
+              <a:t>является</a:t>
+            </a:r>
+            <a:r>
+              <a:rPr lang="ru-RU" sz="2000" b="1" dirty="0">
+                <a:latin typeface="Bahnschrift SemiLight" panose="020B0502040204020203" pitchFamily="34" charset="0"/>
+              </a:rPr>
+              <a:t> </a:t>
+            </a:r>
+            <a:r>
+              <a:rPr lang="ru-RU" sz="2000" dirty="0">
+                <a:latin typeface="Bahnschrift SemiLight" panose="020B0502040204020203" pitchFamily="34" charset="0"/>
+              </a:rPr>
+              <a:t>создание механического манипулятора, обеспечивающего:</a:t>
+            </a:r>
+          </a:p>
+        </p:txBody>
+      </p:sp>
+      <p:sp>
+        <p:nvSpPr>
+          <p:cNvPr id="19" name="TextBox 18">
+            <a:extLst>
+              <a:ext uri="{FF2B5EF4-FFF2-40B4-BE49-F238E27FC236}">
+                <a16:creationId xmlns:a16="http://schemas.microsoft.com/office/drawing/2014/main" id="{000E2DC2-3836-5899-ED03-9909FF0FCEC9}"/>
+              </a:ext>
+            </a:extLst>
+          </p:cNvPr>
+          <p:cNvSpPr txBox="1"/>
+          <p:nvPr/>
+        </p:nvSpPr>
+        <p:spPr>
+          <a:xfrm>
+            <a:off x="777723" y="1560994"/>
+            <a:ext cx="6719872" cy="2400657"/>
+          </a:xfrm>
+          <a:prstGeom prst="rect">
+            <a:avLst/>
+          </a:prstGeom>
+          <a:noFill/>
+        </p:spPr>
+        <p:txBody>
+          <a:bodyPr wrap="square" rtlCol="0">
+            <a:spAutoFit/>
+          </a:bodyPr>
+          <a:lstStyle/>
+          <a:p>
+            <a:pPr marL="342900" indent="-342900">
+              <a:lnSpc>
+                <a:spcPct val="150000"/>
+              </a:lnSpc>
+              <a:buFont typeface="Arial" panose="020B0604020202020204" pitchFamily="34" charset="0"/>
+              <a:buChar char="•"/>
+            </a:pPr>
+            <a:r>
+              <a:rPr lang="ru-RU" sz="2000" dirty="0">
+                <a:latin typeface="Bahnschrift SemiLight" panose="020B0502040204020203" pitchFamily="34" charset="0"/>
+              </a:rPr>
+              <a:t>Стабильное и точное управление курсором</a:t>
+            </a:r>
+          </a:p>
+          <a:p>
+            <a:pPr marL="342900" indent="-342900">
+              <a:lnSpc>
+                <a:spcPct val="150000"/>
+              </a:lnSpc>
+              <a:buFont typeface="Arial" panose="020B0604020202020204" pitchFamily="34" charset="0"/>
+              <a:buChar char="•"/>
+            </a:pPr>
+            <a:r>
+              <a:rPr lang="ru-RU" sz="2000" dirty="0">
+                <a:latin typeface="Bahnschrift SemiLight" panose="020B0502040204020203" pitchFamily="34" charset="0"/>
+              </a:rPr>
+              <a:t>Пассивную физическую стабилизацию руки</a:t>
+            </a:r>
+          </a:p>
+          <a:p>
+            <a:pPr marL="342900" indent="-342900">
+              <a:lnSpc>
+                <a:spcPct val="150000"/>
+              </a:lnSpc>
+              <a:buFont typeface="Arial" panose="020B0604020202020204" pitchFamily="34" charset="0"/>
+              <a:buChar char="•"/>
+            </a:pPr>
+            <a:r>
+              <a:rPr lang="ru-RU" sz="2000" dirty="0">
+                <a:latin typeface="Bahnschrift SemiLight" panose="020B0502040204020203" pitchFamily="34" charset="0"/>
+              </a:rPr>
+              <a:t>Отсутствие сложной калибровки</a:t>
+            </a:r>
+          </a:p>
+          <a:p>
+            <a:pPr marL="342900" indent="-342900">
+              <a:lnSpc>
+                <a:spcPct val="150000"/>
+              </a:lnSpc>
+              <a:buFont typeface="Arial" panose="020B0604020202020204" pitchFamily="34" charset="0"/>
+              <a:buChar char="•"/>
+            </a:pPr>
+            <a:r>
+              <a:rPr lang="ru-RU" sz="2000" dirty="0">
+                <a:latin typeface="Bahnschrift SemiLight" panose="020B0502040204020203" pitchFamily="34" charset="0"/>
+              </a:rPr>
+              <a:t>Работа в любой среде, с плохим освещением или в шумных местах по типу офиса</a:t>
+            </a:r>
+          </a:p>
+        </p:txBody>
+      </p:sp>
+      <p:sp>
+        <p:nvSpPr>
+          <p:cNvPr id="20" name="TextBox 19">
+            <a:extLst>
+              <a:ext uri="{FF2B5EF4-FFF2-40B4-BE49-F238E27FC236}">
+                <a16:creationId xmlns:a16="http://schemas.microsoft.com/office/drawing/2014/main" id="{AE15037D-6E4B-250A-65BF-15C055A81B35}"/>
+              </a:ext>
+            </a:extLst>
+          </p:cNvPr>
+          <p:cNvSpPr txBox="1"/>
+          <p:nvPr/>
+        </p:nvSpPr>
+        <p:spPr>
+          <a:xfrm>
+            <a:off x="3838838" y="3990448"/>
+            <a:ext cx="5655094" cy="400110"/>
+          </a:xfrm>
+          <a:prstGeom prst="rect">
+            <a:avLst/>
+          </a:prstGeom>
+          <a:noFill/>
+        </p:spPr>
+        <p:txBody>
+          <a:bodyPr wrap="square" rtlCol="0">
+            <a:spAutoFit/>
+          </a:bodyPr>
+          <a:lstStyle/>
+          <a:p>
+            <a:r>
+              <a:rPr lang="ru-RU" sz="2000" dirty="0">
+                <a:latin typeface="Bahnschrift SemiLight" panose="020B0502040204020203" pitchFamily="34" charset="0"/>
+              </a:rPr>
+              <a:t>Задачи проекта</a:t>
+            </a:r>
+            <a:r>
+              <a:rPr lang="ru-RU" sz="2000" b="1" dirty="0">
+                <a:latin typeface="Bahnschrift SemiLight" panose="020B0502040204020203" pitchFamily="34" charset="0"/>
+              </a:rPr>
+              <a:t>:</a:t>
+            </a:r>
+          </a:p>
+        </p:txBody>
+      </p:sp>
+      <p:sp>
+        <p:nvSpPr>
+          <p:cNvPr id="21" name="TextBox 20">
+            <a:extLst>
+              <a:ext uri="{FF2B5EF4-FFF2-40B4-BE49-F238E27FC236}">
+                <a16:creationId xmlns:a16="http://schemas.microsoft.com/office/drawing/2014/main" id="{77D84668-9A87-FB8E-C844-42909B460AE2}"/>
+              </a:ext>
+            </a:extLst>
+          </p:cNvPr>
+          <p:cNvSpPr txBox="1"/>
+          <p:nvPr/>
+        </p:nvSpPr>
+        <p:spPr>
+          <a:xfrm>
+            <a:off x="4439263" y="3853173"/>
+            <a:ext cx="7752737" cy="2400657"/>
+          </a:xfrm>
+          <a:prstGeom prst="rect">
+            <a:avLst/>
+          </a:prstGeom>
+          <a:noFill/>
+        </p:spPr>
+        <p:txBody>
+          <a:bodyPr wrap="square" rtlCol="0">
+            <a:spAutoFit/>
+          </a:bodyPr>
+          <a:lstStyle/>
+          <a:p>
+            <a:pPr>
+              <a:lnSpc>
+                <a:spcPct val="150000"/>
+              </a:lnSpc>
+            </a:pPr>
+            <a:endParaRPr lang="ru-RU" sz="2000" dirty="0">
+              <a:latin typeface="Bahnschrift SemiLight" panose="020B0502040204020203" pitchFamily="34" charset="0"/>
+            </a:endParaRPr>
+          </a:p>
+          <a:p>
+            <a:pPr marL="342900" indent="-342900">
+              <a:lnSpc>
+                <a:spcPct val="150000"/>
+              </a:lnSpc>
+              <a:buFont typeface="+mj-lt"/>
+              <a:buAutoNum type="arabicPeriod"/>
+            </a:pPr>
+            <a:r>
+              <a:rPr lang="ru-RU" sz="2000" dirty="0">
+                <a:latin typeface="Bahnschrift SemiLight" panose="020B0502040204020203" pitchFamily="34" charset="0"/>
+              </a:rPr>
+              <a:t>Подобрать материалы и электрические компоненты</a:t>
+            </a:r>
+          </a:p>
+          <a:p>
+            <a:pPr marL="342900" indent="-342900">
+              <a:lnSpc>
+                <a:spcPct val="150000"/>
+              </a:lnSpc>
+              <a:buFont typeface="+mj-lt"/>
+              <a:buAutoNum type="arabicPeriod"/>
+            </a:pPr>
+            <a:r>
+              <a:rPr lang="ru-RU" sz="2000" dirty="0">
+                <a:latin typeface="Bahnschrift SemiLight" panose="020B0502040204020203" pitchFamily="34" charset="0"/>
+              </a:rPr>
+              <a:t>Разработать 3D-модель корпуса с учетом эргономики</a:t>
+            </a:r>
+          </a:p>
+          <a:p>
+            <a:pPr marL="342900" indent="-342900">
+              <a:lnSpc>
+                <a:spcPct val="150000"/>
+              </a:lnSpc>
+              <a:buFont typeface="+mj-lt"/>
+              <a:buAutoNum type="arabicPeriod"/>
+            </a:pPr>
+            <a:r>
+              <a:rPr lang="ru-RU" sz="2000" dirty="0">
+                <a:latin typeface="Bahnschrift SemiLight" panose="020B0502040204020203" pitchFamily="34" charset="0"/>
+              </a:rPr>
+              <a:t>Распечатать и запрограммировать устройство</a:t>
+            </a:r>
+          </a:p>
+          <a:p>
+            <a:pPr marL="342900" indent="-342900">
+              <a:lnSpc>
+                <a:spcPct val="150000"/>
+              </a:lnSpc>
+              <a:buFont typeface="+mj-lt"/>
+              <a:buAutoNum type="arabicPeriod"/>
+            </a:pPr>
+            <a:r>
+              <a:rPr lang="ru-RU" sz="2000" dirty="0">
+                <a:latin typeface="Bahnschrift SemiLight" panose="020B0502040204020203" pitchFamily="34" charset="0"/>
+              </a:rPr>
+              <a:t>Протестировать функциональность</a:t>
+            </a:r>
           </a:p>
         </p:txBody>
       </p:sp>
@@ -6492,7 +6638,7 @@
           <p:nvPr>
             <p:extLst>
               <p:ext uri="{D42A27DB-BD31-4B8C-83A1-F6EECF244321}">
-                <p14:modId xmlns:p14="http://schemas.microsoft.com/office/powerpoint/2010/main" val="1429410467"/>
+                <p14:modId xmlns:p14="http://schemas.microsoft.com/office/powerpoint/2010/main" val="442174884"/>
               </p:ext>
             </p:extLst>
           </p:nvPr>
@@ -6637,7 +6783,28 @@
                           <a:effectLst/>
                           <a:latin typeface="Bookman Old Style" panose="02050604050505020204" pitchFamily="18" charset="0"/>
                         </a:rPr>
-                        <a:t> (330 г.), резиновые накладки и пружины</a:t>
+                        <a:t> (330 г</a:t>
+                      </a:r>
+                      <a:r>
+                        <a:rPr lang="ru-RU" sz="1200" b="0" kern="100" dirty="0" smtClean="0">
+                          <a:effectLst/>
+                          <a:latin typeface="Bookman Old Style" panose="02050604050505020204" pitchFamily="18" charset="0"/>
+                        </a:rPr>
+                        <a:t>.),</a:t>
+                      </a:r>
+                      <a:r>
+                        <a:rPr lang="ru-RU" sz="1200" b="0" kern="100" baseline="0" dirty="0" smtClean="0">
+                          <a:effectLst/>
+                          <a:latin typeface="Bookman Old Style" panose="02050604050505020204" pitchFamily="18" charset="0"/>
+                        </a:rPr>
+                        <a:t> </a:t>
+                      </a:r>
+                      <a:r>
+                        <a:rPr lang="ru-RU" sz="1200" b="0" kern="100" dirty="0" smtClean="0">
+                          <a:effectLst/>
+                          <a:latin typeface="Bookman Old Style" panose="02050604050505020204" pitchFamily="18" charset="0"/>
+                        </a:rPr>
+                        <a:t>пружины</a:t>
                       </a:r>
                       <a:endParaRPr lang="ru-RU" sz="1200" b="0" kern="100" dirty="0">
                         <a:effectLst/>
@@ -6663,13 +6830,13 @@
                         </a:spcAft>
                       </a:pPr>
                       <a:r>
-                        <a:rPr lang="ru-RU" sz="1200" b="0" kern="100" dirty="0">
+                        <a:rPr lang="ru-RU" sz="1200" b="0" kern="100" dirty="0" smtClean="0">
                           <a:effectLst/>
                           <a:latin typeface="Bookman Old Style" panose="02050604050505020204" pitchFamily="18" charset="0"/>
                           <a:ea typeface="+mn-ea"/>
                           <a:cs typeface="+mn-cs"/>
                         </a:rPr>
-                        <a:t>600</a:t>
+                        <a:t>550</a:t>
                       </a:r>
                       <a:endParaRPr lang="ru-RU" sz="1200" b="0" kern="100" dirty="0">
                         <a:effectLst/>
@@ -6702,41 +6869,55 @@
                         </a:spcAft>
                       </a:pPr>
                       <a:r>
-                        <a:rPr lang="ru-RU" sz="1200" b="0" kern="100">
+                        <a:rPr lang="ru-RU" sz="1200" b="0" kern="100" dirty="0">
                           <a:effectLst/>
                           <a:latin typeface="Bookman Old Style" panose="02050604050505020204" pitchFamily="18" charset="0"/>
                         </a:rPr>
-                        <a:t>Электрические компоненты(гироскоп </a:t>
+                        <a:t>Электрические </a:t>
                       </a:r>
                       <a:r>
-                        <a:rPr lang="en-US" sz="1200" b="0" kern="100">
+                        <a:rPr lang="ru-RU" sz="1200" b="0" kern="100" dirty="0" smtClean="0">
                           <a:effectLst/>
                           <a:latin typeface="Bookman Old Style" panose="02050604050505020204" pitchFamily="18" charset="0"/>
                         </a:rPr>
-                        <a:t>MPU</a:t>
+                        <a:t>компоненты(гироскоп,</a:t>
                       </a:r>
                       <a:r>
-                        <a:rPr lang="ru-RU" sz="1200" b="0" kern="100">
+                        <a:rPr lang="ru-RU" sz="1200" b="0" kern="100" baseline="0" dirty="0" smtClean="0">
                           <a:effectLst/>
                           <a:latin typeface="Bookman Old Style" panose="02050604050505020204" pitchFamily="18" charset="0"/>
                         </a:rPr>
-                        <a:t>-6050, тактовые кнопки, энкодер инкрементальный, </a:t>
+                        <a:t> </a:t>
                       </a:r>
                       <a:r>
-                        <a:rPr lang="en-US" sz="1200" b="0" kern="100">
+                        <a:rPr lang="ru-RU" sz="1200" b="0" kern="100" dirty="0" smtClean="0">
+                          <a:effectLst/>
+                          <a:latin typeface="Bookman Old Style" panose="02050604050505020204" pitchFamily="18" charset="0"/>
+                        </a:rPr>
+                        <a:t>кнопки</a:t>
+                      </a:r>
+                      <a:r>
+                        <a:rPr lang="ru-RU" sz="1200" b="0" kern="100" dirty="0">
+                          <a:effectLst/>
+                          <a:latin typeface="Bookman Old Style" panose="02050604050505020204" pitchFamily="18" charset="0"/>
+                        </a:rPr>
+                        <a:t>, энкодер инкрементальный, </a:t>
+                      </a:r>
+                      <a:r>
+                        <a:rPr lang="en-US" sz="1200" b="0" kern="100" dirty="0">
                           <a:effectLst/>
                           <a:latin typeface="Bookman Old Style" panose="02050604050505020204" pitchFamily="18" charset="0"/>
                         </a:rPr>
                         <a:t>Arduino Pro Micro</a:t>
                       </a:r>
                       <a:r>
-                        <a:rPr lang="ru-RU" sz="1200" b="0" kern="100">
+                        <a:rPr lang="ru-RU" sz="1200" b="0" kern="100" dirty="0">
                           <a:effectLst/>
                           <a:latin typeface="Bookman Old Style" panose="02050604050505020204" pitchFamily="18" charset="0"/>
                         </a:rPr>
                         <a:t>)</a:t>
                       </a:r>
-                      <a:endParaRPr lang="ru-RU" sz="1200" b="0" kern="100">
+                      <a:endParaRPr lang="ru-RU" sz="1200" b="0" kern="100" dirty="0">
                         <a:effectLst/>
                         <a:latin typeface="Bookman Old Style" panose="02050604050505020204" pitchFamily="18" charset="0"/>
                         <a:ea typeface="Calibri" panose="020F0502020204030204" pitchFamily="34" charset="0"/>
@@ -6827,11 +7008,11 @@
                         </a:spcAft>
                       </a:pPr>
                       <a:r>
-                        <a:rPr lang="ru-RU" sz="1200" b="0" kern="100" dirty="0">
+                        <a:rPr lang="ru-RU" sz="1200" b="0" kern="100" dirty="0" smtClean="0">
                           <a:effectLst/>
                           <a:latin typeface="Bookman Old Style" panose="02050604050505020204" pitchFamily="18" charset="0"/>
                         </a:rPr>
-                        <a:t>1380</a:t>
+                        <a:t>1330</a:t>
                       </a:r>
                       <a:endParaRPr lang="ru-RU" sz="1200" b="0" kern="100" dirty="0">
                         <a:effectLst/>
@@ -6862,14 +7043,14 @@
           <p:nvPr>
             <p:extLst>
               <p:ext uri="{D42A27DB-BD31-4B8C-83A1-F6EECF244321}">
-                <p14:modId xmlns:p14="http://schemas.microsoft.com/office/powerpoint/2010/main" val="3612873938"/>
+                <p14:modId xmlns:p14="http://schemas.microsoft.com/office/powerpoint/2010/main" val="1539278281"/>
               </p:ext>
             </p:extLst>
           </p:nvPr>
         </p:nvGraphicFramePr>
         <p:xfrm>
           <a:off x="3832848" y="378044"/>
-          <a:ext cx="6574755" cy="5731875"/>
+          <a:ext cx="6574755" cy="5791987"/>
         </p:xfrm>
         <a:graphic>
           <a:graphicData uri="http://schemas.openxmlformats.org/drawingml/2006/table">
@@ -6900,7 +7081,7 @@
                   </a:extLst>
                 </a:gridCol>
               </a:tblGrid>
-              <a:tr h="684725">
+              <a:tr h="619483">
                 <a:tc>
                   <a:txBody>
                     <a:bodyPr/>
@@ -7003,7 +7184,7 @@
                     <a:bodyPr/>
                     <a:lstStyle/>
                     <a:p>
-                      <a:pPr algn="just">
+                      <a:pPr algn="ctr">
                         <a:lnSpc>
                           <a:spcPct val="150000"/>
                         </a:lnSpc>
@@ -7012,27 +7193,41 @@
                         </a:spcAft>
                       </a:pPr>
                       <a:r>
-                        <a:rPr lang="ru-RU" sz="1200" b="0" kern="100">
+                        <a:rPr lang="ru-RU" sz="1200" b="0" kern="100" dirty="0">
                           <a:effectLst/>
                           <a:latin typeface="Bookman Old Style" panose="02050604050505020204" pitchFamily="18" charset="0"/>
                         </a:rPr>
                         <a:t>Пластик </a:t>
                       </a:r>
                       <a:r>
-                        <a:rPr lang="en-US" sz="1200" b="0" kern="100">
+                        <a:rPr lang="en-US" sz="1200" b="0" kern="100" dirty="0" smtClean="0">
                           <a:effectLst/>
                           <a:latin typeface="Bookman Old Style" panose="02050604050505020204" pitchFamily="18" charset="0"/>
                         </a:rPr>
-                        <a:t>PETG</a:t>
+                        <a:t>ABS</a:t>
                       </a:r>
                       <a:r>
-                        <a:rPr lang="ru-RU" sz="1200" b="0" kern="100">
+                        <a:rPr lang="ru-RU" sz="1200" b="0" kern="100" dirty="0" smtClean="0">
                           <a:effectLst/>
                           <a:latin typeface="Bookman Old Style" panose="02050604050505020204" pitchFamily="18" charset="0"/>
                         </a:rPr>
-                        <a:t> (330 г.), резиновые накладки и пружины</a:t>
+                        <a:t> </a:t>
                       </a:r>
-                      <a:endParaRPr lang="ru-RU" sz="1200" b="0" kern="100">
+                      <a:r>
+                        <a:rPr lang="ru-RU" sz="1200" b="0" kern="100" dirty="0">
+                          <a:effectLst/>
+                          <a:latin typeface="Bookman Old Style" panose="02050604050505020204" pitchFamily="18" charset="0"/>
+                        </a:rPr>
+                        <a:t>(330 г.), </a:t>
+                      </a:r>
+                      <a:r>
+                        <a:rPr lang="ru-RU" sz="1200" b="0" kern="100" dirty="0" smtClean="0">
+                          <a:effectLst/>
+                          <a:latin typeface="Bookman Old Style" panose="02050604050505020204" pitchFamily="18" charset="0"/>
+                        </a:rPr>
+                        <a:t>пружины</a:t>
+                      </a:r>
+                      <a:endParaRPr lang="ru-RU" sz="1200" b="0" kern="100" dirty="0">
                         <a:effectLst/>
                         <a:latin typeface="Bookman Old Style" panose="02050604050505020204" pitchFamily="18" charset="0"/>
                         <a:ea typeface="Calibri" panose="020F0502020204030204" pitchFamily="34" charset="0"/>
@@ -7056,13 +7251,13 @@
                         </a:spcAft>
                       </a:pPr>
                       <a:r>
-                        <a:rPr lang="ru-RU" sz="1200" b="0" kern="100">
+                        <a:rPr lang="ru-RU" sz="1200" b="0" kern="100" dirty="0" smtClean="0">
                           <a:effectLst/>
                           <a:latin typeface="Bookman Old Style" panose="02050604050505020204" pitchFamily="18" charset="0"/>
                         </a:rPr>
-                        <a:t>510</a:t>
+                        <a:t>340</a:t>
                       </a:r>
-                      <a:endParaRPr lang="ru-RU" sz="1200" b="0" kern="100">
+                      <a:endParaRPr lang="ru-RU" sz="1200" b="0" kern="100" dirty="0">
                         <a:effectLst/>
                         <a:latin typeface="Bookman Old Style" panose="02050604050505020204" pitchFamily="18" charset="0"/>
                         <a:ea typeface="Calibri" panose="020F0502020204030204" pitchFamily="34" charset="0"/>
@@ -7086,13 +7281,55 @@
                         </a:spcAft>
                       </a:pPr>
                       <a:r>
-                        <a:rPr lang="ru-RU" sz="1200" b="0" kern="100">
+                        <a:rPr lang="ru-RU" sz="1200" b="0" kern="100" dirty="0" smtClean="0">
                           <a:effectLst/>
                           <a:latin typeface="Bookman Old Style" panose="02050604050505020204" pitchFamily="18" charset="0"/>
                         </a:rPr>
-                        <a:t>Оптовая закупка (600 р., Снижение цены 15% при покупке оптом &gt;10 кг пластика или &gt;500 шт. пружин)</a:t>
+                        <a:t>Для</a:t>
                       </a:r>
-                      <a:endParaRPr lang="ru-RU" sz="1200" b="0" kern="100">
+                      <a:r>
+                        <a:rPr lang="ru-RU" sz="1200" b="0" kern="100" baseline="0" dirty="0" smtClean="0">
+                          <a:effectLst/>
+                          <a:latin typeface="Bookman Old Style" panose="02050604050505020204" pitchFamily="18" charset="0"/>
+                        </a:rPr>
+                        <a:t> литья используем </a:t>
+                      </a:r>
+                      <a:r>
+                        <a:rPr lang="en-US" sz="1200" b="0" kern="100" baseline="0" dirty="0" smtClean="0">
+                          <a:effectLst/>
+                          <a:latin typeface="Bookman Old Style" panose="02050604050505020204" pitchFamily="18" charset="0"/>
+                        </a:rPr>
+                        <a:t>ABS. </a:t>
+                      </a:r>
+                      <a:r>
+                        <a:rPr lang="ru-RU" sz="1200" b="0" kern="100" dirty="0" smtClean="0">
+                          <a:effectLst/>
+                          <a:latin typeface="Bookman Old Style" panose="02050604050505020204" pitchFamily="18" charset="0"/>
+                        </a:rPr>
+                        <a:t>Оптовая </a:t>
+                      </a:r>
+                      <a:r>
+                        <a:rPr lang="ru-RU" sz="1200" b="0" kern="100" dirty="0">
+                          <a:effectLst/>
+                          <a:latin typeface="Bookman Old Style" panose="02050604050505020204" pitchFamily="18" charset="0"/>
+                        </a:rPr>
+                        <a:t>закупка </a:t>
+                      </a:r>
+                      <a:r>
+                        <a:rPr lang="ru-RU" sz="1200" b="0" kern="100" dirty="0" smtClean="0">
+                          <a:effectLst/>
+                          <a:latin typeface="Bookman Old Style" panose="02050604050505020204" pitchFamily="18" charset="0"/>
+                        </a:rPr>
+                        <a:t>(400 </a:t>
+                      </a:r>
+                      <a:r>
+                        <a:rPr lang="ru-RU" sz="1200" b="0" kern="100" dirty="0">
+                          <a:effectLst/>
+                          <a:latin typeface="Bookman Old Style" panose="02050604050505020204" pitchFamily="18" charset="0"/>
+                        </a:rPr>
+                        <a:t>р., Снижение цены 15% при покупке оптом &gt;10 кг пластика или &gt;500 шт. пружин)</a:t>
+                      </a:r>
+                      <a:endParaRPr lang="ru-RU" sz="1200" b="0" kern="100" dirty="0">
                         <a:effectLst/>
                         <a:latin typeface="Bookman Old Style" panose="02050604050505020204" pitchFamily="18" charset="0"/>
                         <a:ea typeface="Calibri" panose="020F0502020204030204" pitchFamily="34" charset="0"/>
@@ -7114,7 +7351,7 @@
                     <a:bodyPr/>
                     <a:lstStyle/>
                     <a:p>
-                      <a:pPr>
+                      <a:pPr algn="ctr">
                         <a:lnSpc>
                           <a:spcPct val="150000"/>
                         </a:lnSpc>
@@ -7123,41 +7360,41 @@
                         </a:spcAft>
                       </a:pPr>
                       <a:r>
-                        <a:rPr lang="ru-RU" sz="1200" b="0" kern="100">
+                        <a:rPr lang="ru-RU" sz="1200" b="0" kern="100" dirty="0" smtClean="0">
                           <a:effectLst/>
                           <a:latin typeface="Bookman Old Style" panose="02050604050505020204" pitchFamily="18" charset="0"/>
                         </a:rPr>
-                        <a:t>Электрические компоненты(гироскоп </a:t>
+                        <a:t>Электрические компоненты(гироскоп,</a:t>
                       </a:r>
                       <a:r>
-                        <a:rPr lang="en-US" sz="1200" b="0" kern="100">
+                        <a:rPr lang="ru-RU" sz="1200" b="0" kern="100" baseline="0" dirty="0" smtClean="0">
                           <a:effectLst/>
                           <a:latin typeface="Bookman Old Style" panose="02050604050505020204" pitchFamily="18" charset="0"/>
                         </a:rPr>
-                        <a:t>MPU</a:t>
+                        <a:t> </a:t>
                       </a:r>
                       <a:r>
-                        <a:rPr lang="ru-RU" sz="1200" b="0" kern="100">
+                        <a:rPr lang="ru-RU" sz="1200" b="0" kern="100" dirty="0" smtClean="0">
                           <a:effectLst/>
                           <a:latin typeface="Bookman Old Style" panose="02050604050505020204" pitchFamily="18" charset="0"/>
                         </a:rPr>
-                        <a:t>-6050, тактовые кнопки, энкодер инкрементальный, </a:t>
+                        <a:t>кнопки, энкодер инкрементальный, </a:t>
                       </a:r>
                       <a:r>
-                        <a:rPr lang="en-US" sz="1200" b="0" kern="100">
+                        <a:rPr lang="en-US" sz="1200" b="0" kern="100" dirty="0" smtClean="0">
                           <a:effectLst/>
                           <a:latin typeface="Bookman Old Style" panose="02050604050505020204" pitchFamily="18" charset="0"/>
                         </a:rPr>
                         <a:t>Arduino Pro Micro</a:t>
                       </a:r>
                       <a:r>
-                        <a:rPr lang="ru-RU" sz="1200" b="0" kern="100">
+                        <a:rPr lang="ru-RU" sz="1200" b="0" kern="100" dirty="0" smtClean="0">
                           <a:effectLst/>
                           <a:latin typeface="Bookman Old Style" panose="02050604050505020204" pitchFamily="18" charset="0"/>
                         </a:rPr>
                         <a:t>)</a:t>
                       </a:r>
-                      <a:endParaRPr lang="ru-RU" sz="1200" b="0" kern="100">
+                      <a:endParaRPr lang="ru-RU" sz="1200" b="0" kern="100" dirty="0">
                         <a:effectLst/>
                         <a:latin typeface="Bookman Old Style" panose="02050604050505020204" pitchFamily="18" charset="0"/>
                         <a:ea typeface="Calibri" panose="020F0502020204030204" pitchFamily="34" charset="0"/>
@@ -7248,27 +7485,34 @@
                         </a:spcAft>
                       </a:pPr>
                       <a:r>
-                        <a:rPr lang="ru-RU" sz="1200" b="0" kern="100">
+                        <a:rPr lang="ru-RU" sz="1200" b="0" kern="100" dirty="0" smtClean="0">
                           <a:effectLst/>
                           <a:latin typeface="Bookman Old Style" panose="02050604050505020204" pitchFamily="18" charset="0"/>
                         </a:rPr>
-                        <a:t>Печать на 3</a:t>
+                        <a:t>Литьё из пластмассы</a:t>
                       </a:r>
                       <a:r>
-                        <a:rPr lang="en-US" sz="1200" b="0" kern="100">
+                        <a:rPr lang="ru-RU" sz="1200" b="0" kern="100" baseline="0" dirty="0" smtClean="0">
                           <a:effectLst/>
                           <a:latin typeface="Bookman Old Style" panose="02050604050505020204" pitchFamily="18" charset="0"/>
                         </a:rPr>
-                        <a:t>D</a:t>
+                        <a:t> </a:t>
                       </a:r>
                       <a:r>
-                        <a:rPr lang="ru-RU" sz="1200" b="0" kern="100">
+                        <a:rPr lang="ru-RU" sz="1200" b="0" kern="100" dirty="0" smtClean="0">
                           <a:effectLst/>
                           <a:latin typeface="Bookman Old Style" panose="02050604050505020204" pitchFamily="18" charset="0"/>
                         </a:rPr>
-                        <a:t> принтере и сборка</a:t>
+                        <a:t>и </a:t>
                       </a:r>
-                      <a:endParaRPr lang="ru-RU" sz="1200" b="0" kern="100">
+                      <a:r>
+                        <a:rPr lang="ru-RU" sz="1200" b="0" kern="100" dirty="0">
+                          <a:effectLst/>
+                          <a:latin typeface="Bookman Old Style" panose="02050604050505020204" pitchFamily="18" charset="0"/>
+                        </a:rPr>
+                        <a:t>сборка</a:t>
+                      </a:r>
+                      <a:endParaRPr lang="ru-RU" sz="1200" b="0" kern="100" dirty="0">
                         <a:effectLst/>
                         <a:latin typeface="Bookman Old Style" panose="02050604050505020204" pitchFamily="18" charset="0"/>
                         <a:ea typeface="Calibri" panose="020F0502020204030204" pitchFamily="34" charset="0"/>
@@ -7292,13 +7536,13 @@
                         </a:spcAft>
                       </a:pPr>
                       <a:r>
-                        <a:rPr lang="ru-RU" sz="1200" b="0" kern="100">
+                        <a:rPr lang="ru-RU" sz="1200" b="0" kern="100" dirty="0">
                           <a:effectLst/>
                           <a:latin typeface="Bookman Old Style" panose="02050604050505020204" pitchFamily="18" charset="0"/>
                         </a:rPr>
                         <a:t>250</a:t>
                       </a:r>
-                      <a:endParaRPr lang="ru-RU" sz="1200" b="0" kern="100">
+                      <a:endParaRPr lang="ru-RU" sz="1200" b="0" kern="100" dirty="0">
                         <a:effectLst/>
                         <a:latin typeface="Bookman Old Style" panose="02050604050505020204" pitchFamily="18" charset="0"/>
                         <a:ea typeface="Calibri" panose="020F0502020204030204" pitchFamily="34" charset="0"/>
@@ -7313,26 +7557,42 @@
                     <a:bodyPr/>
                     <a:lstStyle/>
                     <a:p>
-                      <a:pPr>
-                        <a:lnSpc>
-                          <a:spcPct val="150000"/>
-                        </a:lnSpc>
-                        <a:spcAft>
-                          <a:spcPts val="0"/>
-                        </a:spcAft>
-                      </a:pPr>
                       <a:r>
-                        <a:rPr lang="ru-RU" sz="1200" b="0" kern="100">
+                        <a:rPr lang="ru-RU" sz="1200" b="0" kern="100" dirty="0" smtClean="0">
                           <a:effectLst/>
                           <a:latin typeface="Bookman Old Style" panose="02050604050505020204" pitchFamily="18" charset="0"/>
                         </a:rPr>
-                        <a:t>Использование промышленного принтера, а не домашнего(0.5 р./г вместо 1.2 р./г)</a:t>
+                        <a:t>Использование литья</a:t>
                       </a:r>
-                      <a:endParaRPr lang="ru-RU" sz="1200" b="0" kern="100">
+                      <a:r>
+                        <a:rPr lang="ru-RU" sz="1200" b="0" kern="100" baseline="0" dirty="0" smtClean="0">
+                          <a:effectLst/>
+                          <a:latin typeface="Bookman Old Style" panose="02050604050505020204" pitchFamily="18" charset="0"/>
+                        </a:rPr>
+                        <a:t> пластмасс вместо 3</a:t>
+                      </a:r>
+                      <a:r>
+                        <a:rPr lang="en-US" sz="1200" b="0" kern="100" baseline="0" dirty="0" smtClean="0">
+                          <a:effectLst/>
+                          <a:latin typeface="Bookman Old Style" panose="02050604050505020204" pitchFamily="18" charset="0"/>
+                        </a:rPr>
+                        <a:t>D</a:t>
+                      </a:r>
+                      <a:r>
+                        <a:rPr lang="ru-RU" sz="1200" b="0" kern="100" baseline="0" dirty="0" smtClean="0">
+                          <a:effectLst/>
+                          <a:latin typeface="Bookman Old Style" panose="02050604050505020204" pitchFamily="18" charset="0"/>
+                        </a:rPr>
+                        <a:t>-печати</a:t>
+                      </a:r>
+                      <a:endParaRPr lang="ru-RU" sz="1800" b="1" i="0" kern="1200" dirty="0">
+                        <a:solidFill>
+                          <a:schemeClr val="dk1"/>
+                        </a:solidFill>
                         <a:effectLst/>
-                        <a:latin typeface="Bookman Old Style" panose="02050604050505020204" pitchFamily="18" charset="0"/>
-                        <a:ea typeface="Calibri" panose="020F0502020204030204" pitchFamily="34" charset="0"/>
-                        <a:cs typeface="Times New Roman" panose="02020603050405020304" pitchFamily="18" charset="0"/>
+                        <a:latin typeface="+mn-lt"/>
+                        <a:ea typeface="+mn-ea"/>
+                        <a:cs typeface="+mn-cs"/>
                       </a:endParaRPr>
                     </a:p>
                   </a:txBody>
@@ -7350,7 +7610,7 @@
                     <a:bodyPr/>
                     <a:lstStyle/>
                     <a:p>
-                      <a:pPr>
+                      <a:pPr algn="ctr">
                         <a:lnSpc>
                           <a:spcPct val="150000"/>
                         </a:lnSpc>
@@ -7359,13 +7619,13 @@
                         </a:spcAft>
                       </a:pPr>
                       <a:r>
-                        <a:rPr lang="ru-RU" sz="1200" b="0" kern="100">
+                        <a:rPr lang="ru-RU" sz="1200" b="0" kern="100" dirty="0">
                           <a:effectLst/>
                           <a:latin typeface="Bookman Old Style" panose="02050604050505020204" pitchFamily="18" charset="0"/>
                         </a:rPr>
                         <a:t>Упаковка, логистика и маржинальные расходы</a:t>
                       </a:r>
-                      <a:endParaRPr lang="ru-RU" sz="1200" b="0" kern="100">
+                      <a:endParaRPr lang="ru-RU" sz="1200" b="0" kern="100" dirty="0">
                         <a:effectLst/>
                         <a:latin typeface="Bookman Old Style" panose="02050604050505020204" pitchFamily="18" charset="0"/>
                         <a:ea typeface="Calibri" panose="020F0502020204030204" pitchFamily="34" charset="0"/>
@@ -7419,13 +7679,13 @@
                         </a:spcAft>
                       </a:pPr>
                       <a:r>
-                        <a:rPr lang="ru-RU" sz="1200" b="0" kern="100">
+                        <a:rPr lang="ru-RU" sz="1200" b="0" kern="100" dirty="0">
                           <a:effectLst/>
                           <a:latin typeface="Bookman Old Style" panose="02050604050505020204" pitchFamily="18" charset="0"/>
                         </a:rPr>
                         <a:t>Включает цену упаковки, транспортировки, хранения и т.д. </a:t>
                       </a:r>
-                      <a:endParaRPr lang="ru-RU" sz="1200" b="0" kern="100">
+                      <a:endParaRPr lang="ru-RU" sz="1200" b="0" kern="100" dirty="0">
                         <a:effectLst/>
                         <a:latin typeface="Bookman Old Style" panose="02050604050505020204" pitchFamily="18" charset="0"/>
                         <a:ea typeface="Calibri" panose="020F0502020204030204" pitchFamily="34" charset="0"/>
@@ -7447,7 +7707,7 @@
                     <a:bodyPr/>
                     <a:lstStyle/>
                     <a:p>
-                      <a:pPr>
+                      <a:pPr algn="ctr">
                         <a:lnSpc>
                           <a:spcPct val="150000"/>
                         </a:lnSpc>
@@ -7470,7 +7730,14 @@
                         <a:t> </a:t>
                       </a:r>
                       <a:r>
-                        <a:rPr lang="ru-RU" sz="1200" b="0" kern="100" dirty="0">
+                        <a:rPr lang="ru-RU" sz="1200" b="0" kern="100" baseline="0" dirty="0" smtClean="0">
+                          <a:effectLst/>
+                          <a:latin typeface="Bookman Old Style" panose="02050604050505020204" pitchFamily="18" charset="0"/>
+                        </a:rPr>
+                        <a:t>себе</a:t>
+                      </a:r>
+                      <a:r>
+                        <a:rPr lang="ru-RU" sz="1200" b="0" kern="100" dirty="0" smtClean="0">
                           <a:effectLst/>
                           <a:latin typeface="Bookman Old Style" panose="02050604050505020204" pitchFamily="18" charset="0"/>
                         </a:rPr>
@@ -7905,8 +8172,8 @@
         </p:nvSpPr>
         <p:spPr>
           <a:xfrm>
-            <a:off x="494441" y="977552"/>
-            <a:ext cx="7473920" cy="369332"/>
+            <a:off x="165089" y="1055664"/>
+            <a:ext cx="8196466" cy="400110"/>
           </a:xfrm>
           <a:prstGeom prst="rect">
             <a:avLst/>
@@ -7920,19 +8187,19 @@
           <a:lstStyle/>
           <a:p>
             <a:r>
-              <a:rPr lang="ru-RU" dirty="0">
+              <a:rPr lang="ru-RU" sz="2000" dirty="0">
                 <a:latin typeface="Bookman Old Style" panose="02050604050505020204" pitchFamily="18" charset="0"/>
               </a:rPr>
               <a:t>Для 3</a:t>
             </a:r>
             <a:r>
-              <a:rPr lang="en-US" dirty="0">
+              <a:rPr lang="en-US" sz="2000" dirty="0">
                 <a:latin typeface="Bookman Old Style" panose="02050604050505020204" pitchFamily="18" charset="0"/>
               </a:rPr>
               <a:t>D</a:t>
             </a:r>
             <a:r>
-              <a:rPr lang="ru-RU" dirty="0">
+              <a:rPr lang="ru-RU" sz="2000" dirty="0">
                 <a:latin typeface="Bookman Old Style" panose="02050604050505020204" pitchFamily="18" charset="0"/>
               </a:rPr>
               <a:t>-печати рассматривались следующие термопластики:</a:t>
@@ -7954,8 +8221,8 @@
         </p:nvSpPr>
         <p:spPr>
           <a:xfrm>
-            <a:off x="1060337" y="1422892"/>
-            <a:ext cx="7379574" cy="3650102"/>
+            <a:off x="1169927" y="1610610"/>
+            <a:ext cx="7379574" cy="1887696"/>
           </a:xfrm>
           <a:prstGeom prst="rect">
             <a:avLst/>
@@ -7976,26 +8243,11 @@
               <a:buChar char="•"/>
             </a:pPr>
             <a:r>
-              <a:rPr lang="ru-RU" dirty="0">
+              <a:rPr lang="ru-RU" sz="2400" dirty="0" smtClean="0">
                 <a:latin typeface="Bookman Old Style" panose="02050604050505020204" pitchFamily="18" charset="0"/>
               </a:rPr>
-              <a:t>PLA </a:t>
-            </a:r>
-            <a:r>
-              <a:rPr lang="en-US" dirty="0">
-                <a:latin typeface="Bookman Old Style" panose="02050604050505020204" pitchFamily="18" charset="0"/>
-              </a:rPr>
-              <a:t>– </a:t>
-            </a:r>
-            <a:r>
-              <a:rPr lang="ru-RU" dirty="0">
-                <a:latin typeface="Bookman Old Style" panose="02050604050505020204" pitchFamily="18" charset="0"/>
-              </a:rPr>
-              <a:t>легко печатается, биоразлагаем, но хрупок и имеет низкую температуру стеклования (~60°C), что неприемлемо для устройства, которое может остаться в автомобиле на солнце.</a:t>
-            </a:r>
-            <a:endParaRPr lang="en-US" dirty="0">
-              <a:latin typeface="Bookman Old Style" panose="02050604050505020204" pitchFamily="18" charset="0"/>
-            </a:endParaRPr>
+              <a:t>PLA</a:t>
+            </a:r>
           </a:p>
           <a:p>
             <a:pPr marL="285750" indent="-285750">
@@ -8005,25 +8257,7 @@
               <a:buFont typeface="Arial" panose="020B0604020202020204" pitchFamily="34" charset="0"/>
               <a:buChar char="•"/>
             </a:pPr>
-            <a:r>
-              <a:rPr lang="ru-RU" dirty="0">
-                <a:latin typeface="Bookman Old Style" panose="02050604050505020204" pitchFamily="18" charset="0"/>
-              </a:rPr>
-              <a:t>ABS </a:t>
-            </a:r>
-            <a:r>
-              <a:rPr lang="en-US" dirty="0">
-                <a:latin typeface="Bookman Old Style" panose="02050604050505020204" pitchFamily="18" charset="0"/>
-              </a:rPr>
-              <a:t>– </a:t>
-            </a:r>
-            <a:r>
-              <a:rPr lang="ru-RU" dirty="0">
-                <a:latin typeface="Bookman Old Style" panose="02050604050505020204" pitchFamily="18" charset="0"/>
-              </a:rPr>
-              <a:t>прочнее PLA, но склонен к деформациям при печати ведь требует закрытой камеры, и выделяет опасные испарения.</a:t>
-            </a:r>
-            <a:endParaRPr lang="en-US" dirty="0">
+            <a:endParaRPr lang="ru-RU" sz="2400" dirty="0" smtClean="0">
               <a:latin typeface="Bookman Old Style" panose="02050604050505020204" pitchFamily="18" charset="0"/>
             </a:endParaRPr>
           </a:p>
@@ -8036,68 +8270,44 @@
               <a:buChar char="•"/>
             </a:pPr>
             <a:r>
-              <a:rPr lang="ru-RU" dirty="0">
+              <a:rPr lang="ru-RU" sz="2400" dirty="0" smtClean="0">
                 <a:latin typeface="Bookman Old Style" panose="02050604050505020204" pitchFamily="18" charset="0"/>
               </a:rPr>
-              <a:t>PETG </a:t>
-            </a:r>
-            <a:r>
-              <a:rPr lang="en-US" dirty="0">
+              <a:t>ABS</a:t>
+            </a:r>
+          </a:p>
+          <a:p>
+            <a:pPr marL="285750" indent="-285750">
+              <a:lnSpc>
+                <a:spcPts val="2800"/>
+              </a:lnSpc>
+              <a:buFont typeface="Arial" panose="020B0604020202020204" pitchFamily="34" charset="0"/>
+              <a:buChar char="•"/>
+            </a:pPr>
+            <a:endParaRPr lang="ru-RU" sz="2400" dirty="0" smtClean="0">
+              <a:latin typeface="Bookman Old Style" panose="02050604050505020204" pitchFamily="18" charset="0"/>
+            </a:endParaRPr>
+          </a:p>
+          <a:p>
+            <a:pPr marL="285750" indent="-285750">
+              <a:lnSpc>
+                <a:spcPts val="2800"/>
+              </a:lnSpc>
+              <a:buFont typeface="Arial" panose="020B0604020202020204" pitchFamily="34" charset="0"/>
+              <a:buChar char="•"/>
+            </a:pPr>
+            <a:r>
+              <a:rPr lang="ru-RU" sz="2400" dirty="0" smtClean="0">
                 <a:latin typeface="Bookman Old Style" panose="02050604050505020204" pitchFamily="18" charset="0"/>
               </a:rPr>
-              <a:t>–</a:t>
-            </a:r>
-            <a:r>
-              <a:rPr lang="ru-RU" dirty="0">
-                <a:latin typeface="Bookman Old Style" panose="02050604050505020204" pitchFamily="18" charset="0"/>
-              </a:rPr>
-              <a:t> чуть менее прочный чем </a:t>
-            </a:r>
-            <a:r>
-              <a:rPr lang="en-US" dirty="0">
-                <a:latin typeface="Bookman Old Style" panose="02050604050505020204" pitchFamily="18" charset="0"/>
-              </a:rPr>
-              <a:t>ABS, </a:t>
-            </a:r>
-            <a:r>
-              <a:rPr lang="ru-RU" dirty="0">
-                <a:latin typeface="Bookman Old Style" panose="02050604050505020204" pitchFamily="18" charset="0"/>
-              </a:rPr>
-              <a:t>однако не выделяет опасных паров, прост в печати, имеет высокую ударную вязкость и химическую стойкость. </a:t>
-            </a:r>
-          </a:p>
-        </p:txBody>
-      </p:sp>
-      <p:pic>
-        <p:nvPicPr>
-          <p:cNvPr id="11" name="Рисунок 10">
-            <a:extLst>
-              <a:ext uri="{FF2B5EF4-FFF2-40B4-BE49-F238E27FC236}">
-                <a16:creationId xmlns:a16="http://schemas.microsoft.com/office/drawing/2014/main" id="{A48EABFF-670C-99BA-6911-B92A7CCEF09C}"/>
-              </a:ext>
-            </a:extLst>
-          </p:cNvPr>
-          <p:cNvPicPr>
-            <a:picLocks noChangeAspect="1"/>
-          </p:cNvPicPr>
-          <p:nvPr/>
-        </p:nvPicPr>
-        <p:blipFill>
-          <a:blip r:embed="rId2"/>
-          <a:stretch>
-            <a:fillRect/>
-          </a:stretch>
-        </p:blipFill>
-        <p:spPr>
-          <a:xfrm rot="5400000">
-            <a:off x="7896137" y="2432327"/>
-            <a:ext cx="4075367" cy="2395685"/>
-          </a:xfrm>
-          <a:prstGeom prst="rect">
-            <a:avLst/>
-          </a:prstGeom>
-        </p:spPr>
-      </p:pic>
+              <a:t>PETG</a:t>
+            </a:r>
+            <a:endParaRPr lang="ru-RU" sz="2400" dirty="0">
+              <a:latin typeface="Bookman Old Style" panose="02050604050505020204" pitchFamily="18" charset="0"/>
+            </a:endParaRPr>
+          </a:p>
+        </p:txBody>
+      </p:sp>
       <p:sp>
         <p:nvSpPr>
           <p:cNvPr id="12" name="TextBox 11">
@@ -8112,8 +8322,8 @@
         </p:nvSpPr>
         <p:spPr>
           <a:xfrm>
-            <a:off x="494441" y="5344687"/>
-            <a:ext cx="8028431" cy="646331"/>
+            <a:off x="581856" y="4336055"/>
+            <a:ext cx="6816472" cy="1015663"/>
           </a:xfrm>
           <a:prstGeom prst="rect">
             <a:avLst/>
@@ -8127,31 +8337,31 @@
           <a:lstStyle/>
           <a:p>
             <a:r>
-              <a:rPr lang="ru-RU" dirty="0">
+              <a:rPr lang="ru-RU" sz="2000" dirty="0">
                 <a:latin typeface="Bookman Old Style" panose="02050604050505020204" pitchFamily="18" charset="0"/>
               </a:rPr>
               <a:t>Был выбран </a:t>
             </a:r>
             <a:r>
-              <a:rPr lang="en-US" dirty="0">
+              <a:rPr lang="en-US" sz="2000" dirty="0">
                 <a:latin typeface="Bookman Old Style" panose="02050604050505020204" pitchFamily="18" charset="0"/>
               </a:rPr>
               <a:t>PETG </a:t>
             </a:r>
             <a:r>
-              <a:rPr lang="ru-RU" dirty="0">
+              <a:rPr lang="ru-RU" sz="2000" dirty="0">
                 <a:latin typeface="Bookman Old Style" panose="02050604050505020204" pitchFamily="18" charset="0"/>
               </a:rPr>
               <a:t>пластик(</a:t>
             </a:r>
             <a:r>
-              <a:rPr lang="ru-RU" i="1" dirty="0">
+              <a:rPr lang="ru-RU" sz="2000" i="1" dirty="0">
                 <a:latin typeface="Bookman Old Style" panose="02050604050505020204" pitchFamily="18" charset="0"/>
               </a:rPr>
               <a:t>Полиэтилентерефталат гликоль</a:t>
             </a:r>
             <a:r>
-              <a:rPr lang="ru-RU" dirty="0">
+              <a:rPr lang="ru-RU" sz="2000" dirty="0">
                 <a:latin typeface="Bookman Old Style" panose="02050604050505020204" pitchFamily="18" charset="0"/>
               </a:rPr>
               <a:t>), ведь он совмещает лучшие стороны своих конкурентов.</a:t>
@@ -8159,6 +8369,129 @@
           </a:p>
         </p:txBody>
       </p:sp>
+      <p:pic>
+        <p:nvPicPr>
+          <p:cNvPr id="13" name="Picture 4" descr="Picture background"/>
+          <p:cNvPicPr>
+            <a:picLocks noChangeAspect="1" noChangeArrowheads="1"/>
+          </p:cNvPicPr>
+          <p:nvPr/>
+        </p:nvPicPr>
+        <p:blipFill>
+          <a:blip r:embed="rId2">
+            <a:extLst>
+              <a:ext uri="{28A0092B-C50C-407E-A947-70E740481C1C}">
+                <a14:useLocalDpi xmlns:a14="http://schemas.microsoft.com/office/drawing/2010/main" val="0"/>
+              </a:ext>
+            </a:extLst>
+          </a:blip>
+          <a:srcRect/>
+          <a:stretch>
+            <a:fillRect/>
+          </a:stretch>
+        </p:blipFill>
+        <p:spPr bwMode="auto">
+          <a:xfrm>
+            <a:off x="8746097" y="2228719"/>
+            <a:ext cx="2107335" cy="2107336"/>
+          </a:xfrm>
+          <a:prstGeom prst="rect">
+            <a:avLst/>
+          </a:prstGeom>
+          <a:noFill/>
+          <a:extLst>
+            <a:ext uri="{909E8E84-426E-40DD-AFC4-6F175D3DCCD1}">
+              <a14:hiddenFill xmlns:a14="http://schemas.microsoft.com/office/drawing/2010/main">
+                <a:solidFill>
+                  <a:srgbClr val="FFFFFF"/>
+                </a:solidFill>
+              </a14:hiddenFill>
+            </a:ext>
+          </a:extLst>
+        </p:spPr>
+      </p:pic>
+      <p:pic>
+        <p:nvPicPr>
+          <p:cNvPr id="15" name="Picture 2" descr="https://avatars.mds.yandex.net/i?id=7a4480ee1849cf3113c852b398967ca1ffc880d7-5878500-images-thumbs&amp;n=13"/>
+          <p:cNvPicPr>
+            <a:picLocks noChangeAspect="1" noChangeArrowheads="1"/>
+          </p:cNvPicPr>
+          <p:nvPr/>
+        </p:nvPicPr>
+        <p:blipFill>
+          <a:blip r:embed="rId3">
+            <a:extLst>
+              <a:ext uri="{28A0092B-C50C-407E-A947-70E740481C1C}">
+                <a14:useLocalDpi xmlns:a14="http://schemas.microsoft.com/office/drawing/2010/main" val="0"/>
+              </a:ext>
+            </a:extLst>
+          </a:blip>
+          <a:srcRect/>
+          <a:stretch>
+            <a:fillRect/>
+          </a:stretch>
+        </p:blipFill>
+        <p:spPr bwMode="auto">
+          <a:xfrm>
+            <a:off x="9063347" y="566929"/>
+            <a:ext cx="1472837" cy="1472838"/>
+          </a:xfrm>
+          <a:prstGeom prst="rect">
+            <a:avLst/>
+          </a:prstGeom>
+          <a:noFill/>
+          <a:extLst>
+            <a:ext uri="{909E8E84-426E-40DD-AFC4-6F175D3DCCD1}">
+              <a14:hiddenFill xmlns:a14="http://schemas.microsoft.com/office/drawing/2010/main">
+                <a:solidFill>
+                  <a:srgbClr val="FFFFFF"/>
+                </a:solidFill>
+              </a14:hiddenFill>
+            </a:ext>
+          </a:extLst>
+        </p:spPr>
+      </p:pic>
+      <p:pic>
+        <p:nvPicPr>
+          <p:cNvPr id="16" name="Picture 6" descr="Picture background"/>
+          <p:cNvPicPr>
+            <a:picLocks noChangeAspect="1" noChangeArrowheads="1"/>
+          </p:cNvPicPr>
+          <p:nvPr/>
+        </p:nvPicPr>
+        <p:blipFill>
+          <a:blip r:embed="rId4" cstate="hqprint">
+            <a:extLst>
+              <a:ext uri="{28A0092B-C50C-407E-A947-70E740481C1C}">
+                <a14:useLocalDpi xmlns:a14="http://schemas.microsoft.com/office/drawing/2010/main" val="0"/>
+              </a:ext>
+            </a:extLst>
+          </a:blip>
+          <a:srcRect/>
+          <a:stretch>
+            <a:fillRect/>
+          </a:stretch>
+        </p:blipFill>
+        <p:spPr bwMode="auto">
+          <a:xfrm>
+            <a:off x="9226627" y="4421898"/>
+            <a:ext cx="1258357" cy="1615004"/>
+          </a:xfrm>
+          <a:prstGeom prst="rect">
+            <a:avLst/>
+          </a:prstGeom>
+          <a:noFill/>
+          <a:extLst>
+            <a:ext uri="{909E8E84-426E-40DD-AFC4-6F175D3DCCD1}">
+              <a14:hiddenFill xmlns:a14="http://schemas.microsoft.com/office/drawing/2010/main">
+                <a:solidFill>
+                  <a:srgbClr val="FFFFFF"/>
+                </a:solidFill>
+              </a14:hiddenFill>
+            </a:ext>
+          </a:extLst>
+        </p:spPr>
+      </p:pic>
     </p:spTree>
     <p:extLst>
       <p:ext uri="{BB962C8B-B14F-4D97-AF65-F5344CB8AC3E}">
@@ -9006,8 +9339,8 @@
         </p:nvSpPr>
         <p:spPr>
           <a:xfrm>
-            <a:off x="4813462" y="3555743"/>
-            <a:ext cx="4789729" cy="1617559"/>
+            <a:off x="5023720" y="3650552"/>
+            <a:ext cx="4789729" cy="1661993"/>
           </a:xfrm>
           <a:prstGeom prst="rect">
             <a:avLst/>
@@ -9053,8 +9386,17 @@
               <a:rPr lang="ru-RU" sz="1700" dirty="0">
                 <a:latin typeface="Bookman Old Style" panose="02050604050505020204" pitchFamily="18" charset="0"/>
               </a:rPr>
-              <a:t> печать и зачистка деталей</a:t>
-            </a:r>
+              <a:t> печать и зачистка </a:t>
+            </a:r>
+            <a:r>
+              <a:rPr lang="ru-RU" sz="1700" dirty="0" smtClean="0">
+                <a:latin typeface="Bookman Old Style" panose="02050604050505020204" pitchFamily="18" charset="0"/>
+              </a:rPr>
+              <a:t>деталей.</a:t>
+            </a:r>
+            <a:endParaRPr lang="ru-RU" sz="1700" dirty="0">
+              <a:latin typeface="Bookman Old Style" panose="02050604050505020204" pitchFamily="18" charset="0"/>
+            </a:endParaRPr>
           </a:p>
         </p:txBody>
       </p:sp>
@@ -9924,14 +10266,150 @@
       </p:pic>
       <p:sp>
         <p:nvSpPr>
-          <p:cNvPr id="3" name="TextBox 2"/>
+          <p:cNvPr id="7" name="TextBox 6"/>
           <p:cNvSpPr txBox="1"/>
           <p:nvPr/>
         </p:nvSpPr>
         <p:spPr>
           <a:xfrm>
-            <a:off x="482037" y="1087021"/>
-            <a:ext cx="6943112" cy="1793824"/>
+            <a:off x="248263" y="668706"/>
+            <a:ext cx="2371725" cy="369332"/>
+          </a:xfrm>
+          <a:prstGeom prst="rect">
+            <a:avLst/>
+          </a:prstGeom>
+          <a:noFill/>
+        </p:spPr>
+        <p:txBody>
+          <a:bodyPr wrap="square" rtlCol="0">
+            <a:spAutoFit/>
+          </a:bodyPr>
+          <a:lstStyle/>
+          <a:p>
+            <a:r>
+              <a:rPr lang="ru-RU" dirty="0">
+                <a:latin typeface="Bookman Old Style" panose="02050604050505020204" pitchFamily="18" charset="0"/>
+              </a:rPr>
+              <a:t>Итоги работы:</a:t>
+            </a:r>
+          </a:p>
+        </p:txBody>
+      </p:sp>
+      <p:sp>
+        <p:nvSpPr>
+          <p:cNvPr id="12" name="TextBox 11"/>
+          <p:cNvSpPr txBox="1"/>
+          <p:nvPr/>
+        </p:nvSpPr>
+        <p:spPr>
+          <a:xfrm>
+            <a:off x="248263" y="4674337"/>
+            <a:ext cx="5876925" cy="836126"/>
+          </a:xfrm>
+          <a:prstGeom prst="rect">
+            <a:avLst/>
+          </a:prstGeom>
+          <a:noFill/>
+        </p:spPr>
+        <p:txBody>
+          <a:bodyPr wrap="square" rtlCol="0">
+            <a:spAutoFit/>
+          </a:bodyPr>
+          <a:lstStyle/>
+          <a:p>
+            <a:pPr>
+              <a:lnSpc>
+                <a:spcPts val="2900"/>
+              </a:lnSpc>
+            </a:pPr>
+            <a:r>
+              <a:rPr lang="ru-RU" dirty="0">
+                <a:latin typeface="Bookman Old Style" panose="02050604050505020204" pitchFamily="18" charset="0"/>
+              </a:rPr>
+              <a:t>Предполагается развитие проекта в будущем: интеграция</a:t>
+            </a:r>
+            <a:r>
+              <a:rPr lang="en-US" dirty="0">
+                <a:latin typeface="Bookman Old Style" panose="02050604050505020204" pitchFamily="18" charset="0"/>
+              </a:rPr>
+              <a:t> c</a:t>
+            </a:r>
+            <a:r>
+              <a:rPr lang="ru-RU" dirty="0">
+                <a:latin typeface="Bookman Old Style" panose="02050604050505020204" pitchFamily="18" charset="0"/>
+              </a:rPr>
+              <a:t> </a:t>
+            </a:r>
+            <a:r>
+              <a:rPr lang="en-US" dirty="0">
+                <a:latin typeface="Bookman Old Style" panose="02050604050505020204" pitchFamily="18" charset="0"/>
+              </a:rPr>
+              <a:t>Bluetooth</a:t>
+            </a:r>
+            <a:r>
+              <a:rPr lang="ru-RU" dirty="0">
+                <a:latin typeface="Bookman Old Style" panose="02050604050505020204" pitchFamily="18" charset="0"/>
+              </a:rPr>
+              <a:t> </a:t>
+            </a:r>
+            <a:r>
+              <a:rPr lang="en-US" dirty="0">
+                <a:latin typeface="Bookman Old Style" panose="02050604050505020204" pitchFamily="18" charset="0"/>
+              </a:rPr>
+              <a:t>5.3</a:t>
+            </a:r>
+            <a:endParaRPr lang="ru-RU" dirty="0">
+              <a:latin typeface="Bookman Old Style" panose="02050604050505020204" pitchFamily="18" charset="0"/>
+            </a:endParaRPr>
+          </a:p>
+        </p:txBody>
+      </p:sp>
+      <p:sp>
+        <p:nvSpPr>
+          <p:cNvPr id="6" name="TextBox 5"/>
+          <p:cNvSpPr txBox="1"/>
+          <p:nvPr/>
+        </p:nvSpPr>
+        <p:spPr>
+          <a:xfrm>
+            <a:off x="248263" y="3359528"/>
+            <a:ext cx="6623592" cy="836126"/>
+          </a:xfrm>
+          <a:prstGeom prst="rect">
+            <a:avLst/>
+          </a:prstGeom>
+          <a:noFill/>
+        </p:spPr>
+        <p:txBody>
+          <a:bodyPr wrap="square" rtlCol="0">
+            <a:spAutoFit/>
+          </a:bodyPr>
+          <a:lstStyle/>
+          <a:p>
+            <a:pPr>
+              <a:lnSpc>
+                <a:spcPts val="2900"/>
+              </a:lnSpc>
+            </a:pPr>
+            <a:r>
+              <a:rPr lang="ru-RU" dirty="0">
+                <a:latin typeface="Bookman Old Style" panose="02050604050505020204" pitchFamily="18" charset="0"/>
+              </a:rPr>
+              <a:t>Я считаю, что все поставленные задачи выполнены и устройство можно считать завершенным.</a:t>
+            </a:r>
+          </a:p>
+        </p:txBody>
+      </p:sp>
+      <p:sp>
+        <p:nvSpPr>
+          <p:cNvPr id="15" name="TextBox 14"/>
+          <p:cNvSpPr txBox="1"/>
+          <p:nvPr/>
+        </p:nvSpPr>
+        <p:spPr>
+          <a:xfrm>
+            <a:off x="537454" y="1137230"/>
+            <a:ext cx="6943112" cy="1823576"/>
           </a:xfrm>
           <a:prstGeom prst="rect">
             <a:avLst/>
@@ -9952,10 +10430,16 @@
               <a:buChar char="•"/>
             </a:pPr>
             <a:r>
-              <a:rPr lang="ru-RU" dirty="0">
+              <a:rPr lang="ru-RU" sz="2000" dirty="0">
                 <a:latin typeface="Bookman Old Style" panose="02050604050505020204" pitchFamily="18" charset="0"/>
               </a:rPr>
-              <a:t>Создан работающий прототип, стабилизирующий мелкие движения и успешно заменяющий компьютерную мышь. </a:t>
+              <a:t>Создан работающий </a:t>
+            </a:r>
+            <a:r>
+              <a:rPr lang="ru-RU" sz="2000" dirty="0" smtClean="0">
+                <a:latin typeface="Bookman Old Style" panose="02050604050505020204" pitchFamily="18" charset="0"/>
+              </a:rPr>
+              <a:t>прототип</a:t>
             </a:r>
           </a:p>
           <a:p>
@@ -9966,12 +10450,9 @@
               <a:buFont typeface="Arial" panose="020B0604020202020204" pitchFamily="34" charset="0"/>
               <a:buChar char="•"/>
             </a:pPr>
-            <a:r>
-              <a:rPr lang="ru-RU" dirty="0">
-                <a:latin typeface="Bookman Old Style" panose="02050604050505020204" pitchFamily="18" charset="0"/>
-              </a:rPr>
-              <a:t>Устройство не имеет колоссальной цены.</a:t>
-            </a:r>
+            <a:endParaRPr lang="en-US" sz="2000" dirty="0" smtClean="0">
+              <a:latin typeface="Bookman Old Style" panose="02050604050505020204" pitchFamily="18" charset="0"/>
+            </a:endParaRPr>
           </a:p>
           <a:p>
             <a:pPr marL="285750" indent="-285750">
@@ -9982,146 +10463,49 @@
               <a:buChar char="•"/>
             </a:pPr>
             <a:r>
-              <a:rPr lang="ru-RU" dirty="0">
+              <a:rPr lang="ru-RU" sz="2000" dirty="0" smtClean="0">
+                <a:latin typeface="Bookman Old Style" panose="02050604050505020204" pitchFamily="18" charset="0"/>
+              </a:rPr>
+              <a:t>Устройство </a:t>
+            </a:r>
+            <a:r>
+              <a:rPr lang="ru-RU" sz="2000" dirty="0">
+                <a:latin typeface="Bookman Old Style" panose="02050604050505020204" pitchFamily="18" charset="0"/>
+              </a:rPr>
+              <a:t>не имеет колоссальной </a:t>
+            </a:r>
+            <a:r>
+              <a:rPr lang="ru-RU" sz="2000" dirty="0" smtClean="0">
+                <a:latin typeface="Bookman Old Style" panose="02050604050505020204" pitchFamily="18" charset="0"/>
+              </a:rPr>
+              <a:t>цены.</a:t>
+            </a:r>
+          </a:p>
+          <a:p>
+            <a:pPr marL="285750" indent="-285750">
+              <a:lnSpc>
+                <a:spcPts val="2700"/>
+              </a:lnSpc>
+              <a:buFont typeface="Arial" panose="020B0604020202020204" pitchFamily="34" charset="0"/>
+              <a:buChar char="•"/>
+            </a:pPr>
+            <a:endParaRPr lang="ru-RU" sz="2000" dirty="0">
+              <a:latin typeface="Bookman Old Style" panose="02050604050505020204" pitchFamily="18" charset="0"/>
+            </a:endParaRPr>
+          </a:p>
+          <a:p>
+            <a:pPr marL="285750" indent="-285750">
+              <a:lnSpc>
+                <a:spcPts val="2700"/>
+              </a:lnSpc>
+              <a:buFont typeface="Arial" panose="020B0604020202020204" pitchFamily="34" charset="0"/>
+              <a:buChar char="•"/>
+            </a:pPr>
+            <a:r>
+              <a:rPr lang="ru-RU" sz="2000" dirty="0">
                 <a:latin typeface="Bookman Old Style" panose="02050604050505020204" pitchFamily="18" charset="0"/>
               </a:rPr>
               <a:t>Учтены ключевые эргономические требования.</a:t>
-            </a:r>
-          </a:p>
-        </p:txBody>
-      </p:sp>
-      <p:sp>
-        <p:nvSpPr>
-          <p:cNvPr id="7" name="TextBox 6"/>
-          <p:cNvSpPr txBox="1"/>
-          <p:nvPr/>
-        </p:nvSpPr>
-        <p:spPr>
-          <a:xfrm>
-            <a:off x="248263" y="668706"/>
-            <a:ext cx="2371725" cy="369332"/>
-          </a:xfrm>
-          <a:prstGeom prst="rect">
-            <a:avLst/>
-          </a:prstGeom>
-          <a:noFill/>
-        </p:spPr>
-        <p:txBody>
-          <a:bodyPr wrap="square" rtlCol="0">
-            <a:spAutoFit/>
-          </a:bodyPr>
-          <a:lstStyle/>
-          <a:p>
-            <a:r>
-              <a:rPr lang="ru-RU" dirty="0">
-                <a:latin typeface="Bookman Old Style" panose="02050604050505020204" pitchFamily="18" charset="0"/>
-              </a:rPr>
-              <a:t>Итоги работы:</a:t>
-            </a:r>
-          </a:p>
-        </p:txBody>
-      </p:sp>
-      <p:sp>
-        <p:nvSpPr>
-          <p:cNvPr id="12" name="TextBox 11"/>
-          <p:cNvSpPr txBox="1"/>
-          <p:nvPr/>
-        </p:nvSpPr>
-        <p:spPr>
-          <a:xfrm>
-            <a:off x="248263" y="4674337"/>
-            <a:ext cx="5876925" cy="836126"/>
-          </a:xfrm>
-          <a:prstGeom prst="rect">
-            <a:avLst/>
-          </a:prstGeom>
-          <a:noFill/>
-        </p:spPr>
-        <p:txBody>
-          <a:bodyPr wrap="square" rtlCol="0">
-            <a:spAutoFit/>
-          </a:bodyPr>
-          <a:lstStyle/>
-          <a:p>
-            <a:pPr>
-              <a:lnSpc>
-                <a:spcPts val="2900"/>
-              </a:lnSpc>
-            </a:pPr>
-            <a:r>
-              <a:rPr lang="ru-RU" dirty="0">
-                <a:latin typeface="Bookman Old Style" panose="02050604050505020204" pitchFamily="18" charset="0"/>
-              </a:rPr>
-              <a:t>Предполагается развитие проекта в будущем: интеграция</a:t>
-            </a:r>
-            <a:r>
-              <a:rPr lang="en-US" dirty="0">
-                <a:latin typeface="Bookman Old Style" panose="02050604050505020204" pitchFamily="18" charset="0"/>
-              </a:rPr>
-              <a:t> c</a:t>
-            </a:r>
-            <a:r>
-              <a:rPr lang="ru-RU" dirty="0">
-                <a:latin typeface="Bookman Old Style" panose="02050604050505020204" pitchFamily="18" charset="0"/>
-              </a:rPr>
-              <a:t> </a:t>
-            </a:r>
-            <a:r>
-              <a:rPr lang="en-US" dirty="0">
-                <a:latin typeface="Bookman Old Style" panose="02050604050505020204" pitchFamily="18" charset="0"/>
-              </a:rPr>
-              <a:t>Bluetooth</a:t>
-            </a:r>
-            <a:r>
-              <a:rPr lang="ru-RU" dirty="0">
-                <a:latin typeface="Bookman Old Style" panose="02050604050505020204" pitchFamily="18" charset="0"/>
-              </a:rPr>
-              <a:t> </a:t>
-            </a:r>
-            <a:r>
-              <a:rPr lang="en-US" dirty="0">
-                <a:latin typeface="Bookman Old Style" panose="02050604050505020204" pitchFamily="18" charset="0"/>
-              </a:rPr>
-              <a:t>5.3</a:t>
-            </a:r>
-            <a:endParaRPr lang="ru-RU" dirty="0">
-              <a:latin typeface="Bookman Old Style" panose="02050604050505020204" pitchFamily="18" charset="0"/>
-            </a:endParaRPr>
-          </a:p>
-        </p:txBody>
-      </p:sp>
-      <p:sp>
-        <p:nvSpPr>
-          <p:cNvPr id="6" name="TextBox 5"/>
-          <p:cNvSpPr txBox="1"/>
-          <p:nvPr/>
-        </p:nvSpPr>
-        <p:spPr>
-          <a:xfrm>
-            <a:off x="248263" y="3359528"/>
-            <a:ext cx="6623592" cy="836126"/>
-          </a:xfrm>
-          <a:prstGeom prst="rect">
-            <a:avLst/>
-          </a:prstGeom>
-          <a:noFill/>
-        </p:spPr>
-        <p:txBody>
-          <a:bodyPr wrap="square" rtlCol="0">
-            <a:spAutoFit/>
-          </a:bodyPr>
-          <a:lstStyle/>
-          <a:p>
-            <a:pPr>
-              <a:lnSpc>
-                <a:spcPts val="2900"/>
-              </a:lnSpc>
-            </a:pPr>
-            <a:r>
-              <a:rPr lang="ru-RU" dirty="0">
-                <a:latin typeface="Bookman Old Style" panose="02050604050505020204" pitchFamily="18" charset="0"/>
-              </a:rPr>
-              <a:t>Я считаю, что все поставленные задачи выполнены и устройство можно считать завершенным.</a:t>
             </a:r>
           </a:p>
         </p:txBody>
